--- a/docs/submission/presenter-kit/explanation-ja.pptx
+++ b/docs/submission/presenter-kit/explanation-ja.pptx
@@ -872,7 +872,7 @@
             <a:r>
               <a:rPr lang="en-US" dirty="0"/>
               <a:t>動作の証拠と、改善効果を分ける
-数値は保存済み検証の結果。公開版の学習成績ではない。採餌研究は5探索seed・各条件60未使用環境で、終了時エネルギーも悪化。動画は現行の環境TX仕様より前の記録。
+数値は保存済み検証の結果。公開版の学習成績ではない。採餌研究は5探索seed・各条件60未使用環境で、終了時エネルギーも悪化。撮り直した動画は現行の環境TX仕様に対応。全神経の採餌readoutと公開版のQ学習は別実装。
 約1分の説明原稿: 私たちが作りたいのは、生物由来の判断モデルをアプリで使い、学習の効果まで確かめられるフレームワークです。まず、危険エリアを含む初期環境をTXに記録します。次に、確定した刺激TXで餌を追加し、ハエが移動や休息を選びます。学習では、その環境と経験を再生し、改善した候補を採用します。ここで示すのは、入力から判断・学習までを追える仕組みです。別の対照実験では報酬は改善しましたが、生物回路の優位は確認できませんでした。次は、同じ仕事で小型AIと比べ、適応の速さと計算資源に利点があるかを測ります。
 Sources: docs/submission/sepolia-evidence.json; presenter-kit/capture-evidence.json; docs/research/bioagent-adaptation/README.md. Timing is a suggested pace, not measured narration.</a:t>
             </a:r>
@@ -3062,7 +3062,7 @@
                   <a:srgbClr val="153C38"/>
                 </a:solidFill>
               </a:rPr>
-              <a:t>動画：全神経4個体、Aqua 1件・V3 11件の決済</a:t>
+              <a:t>動画：全神経4個体、Aqua 2件・V3 25件の決済</a:t>
             </a:r>
             <a:endParaRPr lang="en-US" sz="2000" dirty="0"/>
           </a:p>

--- a/docs/submission/presenter-kit/explanation-ja.pptx
+++ b/docs/submission/presenter-kit/explanation-ja.pptx
@@ -11,9 +11,10 @@
     <p:sldId id="259" r:id="rId5"/>
     <p:sldId id="260" r:id="rId6"/>
     <p:sldId id="261" r:id="rId7"/>
+    <p:sldId id="262" r:id="rId8"/>
   </p:sldIdLst>
   <p:notesMasterIdLst>
-    <p:notesMasterId r:id="rId8"/>
+    <p:notesMasterId r:id="rId9"/>
   </p:notesMasterIdLst>
   <p:sldSz cx="12192000" cy="6858000"/>
   <p:notesSz cx="6858000" cy="12192000"/>
@@ -989,6 +990,97 @@
             <a:fld id="{F7021451-1387-4CA6-816F-3879F97B5CBC}" type="slidenum">
               <a:rPr lang="en-US"/>
               <a:t>6</a:t>
+            </a:fld>
+            <a:endParaRPr lang="en-US"/>
+          </a:p>
+        </p:txBody>
+      </p:sp>
+    </p:spTree>
+    <p:extLst>
+      <p:ext uri="{BB962C8B-B14F-4D97-AF65-F5344CB8AC3E}">
+        <p14:creationId xmlns:p14="http://schemas.microsoft.com/office/powerpoint/2010/main" val="1024086991"/>
+      </p:ext>
+    </p:extLst>
+  </p:cSld>
+  <p:clrMapOvr>
+    <a:masterClrMapping/>
+  </p:clrMapOvr>
+</p:notes>
+</file>
+
+<file path=ppt/notesSlides/notesSlide7.xml><?xml version="1.0" encoding="utf-8"?>
+<p:notes xmlns:a="http://schemas.openxmlformats.org/drawingml/2006/main" xmlns:r="http://schemas.openxmlformats.org/officeDocument/2006/relationships" xmlns:p="http://schemas.openxmlformats.org/presentationml/2006/main">
+  <p:cSld>
+    <p:spTree>
+      <p:nvGrpSpPr>
+        <p:cNvPr id="1" name=""/>
+        <p:cNvGrpSpPr/>
+        <p:nvPr/>
+      </p:nvGrpSpPr>
+      <p:grpSpPr>
+        <a:xfrm>
+          <a:off x="0" y="0"/>
+          <a:ext cx="0" cy="0"/>
+          <a:chOff x="0" y="0"/>
+          <a:chExt cx="0" cy="0"/>
+        </a:xfrm>
+      </p:grpSpPr>
+      <p:sp>
+        <p:nvSpPr>
+          <p:cNvPr id="2" name="Slide Image Placeholder 1"/>
+          <p:cNvSpPr>
+            <a:spLocks noGrp="1" noRot="1" noChangeAspect="1"/>
+          </p:cNvSpPr>
+          <p:nvPr>
+            <p:ph type="sldImg"/>
+          </p:nvPr>
+        </p:nvSpPr>
+        <p:spPr/>
+      </p:sp>
+      <p:sp>
+        <p:nvSpPr>
+          <p:cNvPr id="3" name="Notes Placeholder 2"/>
+          <p:cNvSpPr>
+            <a:spLocks noGrp="1"/>
+          </p:cNvSpPr>
+          <p:nvPr>
+            <p:ph type="body" idx="1"/>
+          </p:nvPr>
+        </p:nvSpPr>
+        <p:spPr/>
+        <p:txBody>
+          <a:bodyPr/>
+          <a:lstStyle/>
+          <a:p>
+            <a:r>
+              <a:rPr lang="en-US" dirty="0"/>
+              <a:t>どこで動き、何を境界越しに渡すか
+公開版はJavaScriptの7神経計算とQ学習をブラウザー内で実行します。Workersは静的配信と検証済み入力の取得を担当し、定期送信はWorker Secretの所有者鍵とDurable Objectの送信記録を使います。手動Sepolia送信は所有者のブラウザーwallet、Anvilはローカルアカウントです。全神経版はNode.jsが世界、報酬、署名・取引を制御し、Python子プロセスとstdin/stdoutのJSON Linesで通信します。Pythonは166,700神経と学習readoutを計算し、秘密鍵を使いません。採餌経験はSQLite、市場readoutはJSON、公開方策と餌消費履歴はlocalStorageへ保存します。Solidityはowner、revision/nonce、入力と決済を扱い、推論や学習は実行しません。TypeScriptの共有型は仕様案で、全ランタイムへ統合済みではありません。独立JSフレームワークも別実装です。詳細：docs/architecture.md。
+約1分の説明原稿: 私たちが作りたいのは、生物由来の判断モデルをアプリで使い、学習の効果まで確かめられるフレームワークです。まず、危険エリアを含む初期環境をTXに記録します。次に、確定した刺激TXで餌を追加し、ハエが移動や休息を選びます。学習では、その環境と経験を再生し、改善した候補を採用します。ここで示すのは、入力から判断・学習までを追える仕組みです。別の対照実験では報酬は改善しましたが、生物回路の優位は確認できませんでした。次は、同じ仕事で小型AIと比べ、適応の速さと計算資源に利点があるかを測ります。
+Sources: docs/submission/sepolia-evidence.json; presenter-kit/capture-evidence.json; docs/research/bioagent-adaptation/README.md. Timing is a suggested pace, not measured narration.</a:t>
+            </a:r>
+            <a:endParaRPr lang="en-US" dirty="0"/>
+          </a:p>
+        </p:txBody>
+      </p:sp>
+      <p:sp>
+        <p:nvSpPr>
+          <p:cNvPr id="4" name="Slide Number Placeholder 3"/>
+          <p:cNvSpPr>
+            <a:spLocks noGrp="1"/>
+          </p:cNvSpPr>
+          <p:nvPr>
+            <p:ph type="sldNum" sz="quarter" idx="10"/>
+          </p:nvPr>
+        </p:nvSpPr>
+        <p:spPr/>
+        <p:txBody>
+          <a:bodyPr/>
+          <a:lstStyle/>
+          <a:p>
+            <a:fld id="{F7021451-1387-4CA6-816F-3879F97B5CBC}" type="slidenum">
+              <a:rPr lang="en-US"/>
+              <a:t>7</a:t>
             </a:fld>
             <a:endParaRPr lang="en-US"/>
           </a:p>
@@ -1684,7 +1776,7 @@
                   <a:srgbClr val="607B70"/>
                 </a:solidFill>
               </a:rPr>
-              <a:t>1 / 6    ·    0–10s    ·    2026-09-26</a:t>
+              <a:t>1 / 7    ·    0–10s    ·    2026-09-26</a:t>
             </a:r>
             <a:endParaRPr lang="en-US" sz="1000" dirty="0"/>
           </a:p>
@@ -2068,7 +2160,7 @@
                   <a:srgbClr val="607B70"/>
                 </a:solidFill>
               </a:rPr>
-              <a:t>2 / 6    ·    10–20s    ·    2026-09-26</a:t>
+              <a:t>2 / 7    ·    10–20s    ·    2026-09-26</a:t>
             </a:r>
             <a:endParaRPr lang="en-US" sz="1000" dirty="0"/>
           </a:p>
@@ -2452,7 +2544,7 @@
                   <a:srgbClr val="607B70"/>
                 </a:solidFill>
               </a:rPr>
-              <a:t>3 / 6    ·    20–30s    ·    2026-09-26</a:t>
+              <a:t>3 / 7    ·    20–30s    ·    2026-09-26</a:t>
             </a:r>
             <a:endParaRPr lang="en-US" sz="1000" dirty="0"/>
           </a:p>
@@ -2836,7 +2928,7 @@
                   <a:srgbClr val="607B70"/>
                 </a:solidFill>
               </a:rPr>
-              <a:t>4 / 6    ·    30–40s    ·    2026-09-26</a:t>
+              <a:t>4 / 7    ·    30–40s    ·    2026-09-26</a:t>
             </a:r>
             <a:endParaRPr lang="en-US" sz="1000" dirty="0"/>
           </a:p>
@@ -3220,7 +3312,7 @@
                   <a:srgbClr val="607B70"/>
                 </a:solidFill>
               </a:rPr>
-              <a:t>5 / 6    ·    40–50s    ·    2026-09-26</a:t>
+              <a:t>5 / 7    ·    40–50s    ·    2026-09-26</a:t>
             </a:r>
             <a:endParaRPr lang="en-US" sz="1000" dirty="0"/>
           </a:p>
@@ -3604,7 +3696,2473 @@
                   <a:srgbClr val="607B70"/>
                 </a:solidFill>
               </a:rPr>
-              <a:t>6 / 6    ·    50–60s    ·    2026-09-26</a:t>
+              <a:t>6 / 7    ·    50–60s    ·    2026-09-26</a:t>
+            </a:r>
+            <a:endParaRPr lang="en-US" sz="1000" dirty="0"/>
+          </a:p>
+        </p:txBody>
+      </p:sp>
+    </p:spTree>
+  </p:cSld>
+  <p:clrMapOvr>
+    <a:masterClrMapping/>
+  </p:clrMapOvr>
+</p:sld>
+</file>
+
+<file path=ppt/slides/slide7.xml><?xml version="1.0" encoding="utf-8"?>
+<p:sld xmlns:a="http://schemas.openxmlformats.org/drawingml/2006/main" xmlns:r="http://schemas.openxmlformats.org/officeDocument/2006/relationships" xmlns:p="http://schemas.openxmlformats.org/presentationml/2006/main">
+  <p:cSld name="Slide 7">
+    <p:bg>
+      <p:bgPr>
+        <a:solidFill>
+          <a:srgbClr val="F4F6EF"/>
+        </a:solidFill>
+      </p:bgPr>
+    </p:bg>
+    <p:spTree>
+      <p:nvGrpSpPr>
+        <p:cNvPr id="1" name=""/>
+        <p:cNvGrpSpPr/>
+        <p:nvPr/>
+      </p:nvGrpSpPr>
+      <p:grpSpPr>
+        <a:xfrm>
+          <a:off x="0" y="0"/>
+          <a:ext cx="0" cy="0"/>
+          <a:chOff x="0" y="0"/>
+          <a:chExt cx="0" cy="0"/>
+        </a:xfrm>
+      </p:grpSpPr>
+      <p:sp>
+        <p:nvSpPr>
+          <p:cNvPr id="2" name="Text 0"/>
+          <p:cNvSpPr/>
+          <p:nvPr/>
+        </p:nvSpPr>
+        <p:spPr>
+          <a:xfrm>
+            <a:off x="548640" y="384048"/>
+            <a:ext cx="11064240" cy="274320"/>
+          </a:xfrm>
+          <a:prstGeom prst="rect">
+            <a:avLst/>
+          </a:prstGeom>
+          <a:noFill/>
+          <a:ln/>
+        </p:spPr>
+        <p:txBody>
+          <a:bodyPr wrap="square" lIns="0" tIns="0" rIns="0" bIns="0" rtlCol="0" anchor="ctr"/>
+          <a:lstStyle/>
+          <a:p>
+            <a:pPr indent="0" marL="0">
+              <a:buNone/>
+            </a:pPr>
+            <a:r>
+              <a:rPr lang="en-US" sz="1200" b="1" dirty="0">
+                <a:solidFill>
+                  <a:srgbClr val="26735F"/>
+                </a:solidFill>
+              </a:rPr>
+              <a:t>BIOAGENT  /  APPENDIX · 実行境界と言語</a:t>
+            </a:r>
+            <a:endParaRPr lang="en-US" sz="1200" dirty="0"/>
+          </a:p>
+        </p:txBody>
+      </p:sp>
+      <p:sp>
+        <p:nvSpPr>
+          <p:cNvPr id="3" name="Text 1"/>
+          <p:cNvSpPr/>
+          <p:nvPr/>
+        </p:nvSpPr>
+        <p:spPr>
+          <a:xfrm>
+            <a:off x="548640" y="850392"/>
+            <a:ext cx="11064240" cy="640080"/>
+          </a:xfrm>
+          <a:prstGeom prst="rect">
+            <a:avLst/>
+          </a:prstGeom>
+          <a:noFill/>
+          <a:ln/>
+        </p:spPr>
+        <p:txBody>
+          <a:bodyPr wrap="square" lIns="0" tIns="0" rIns="0" bIns="0" rtlCol="0" anchor="ctr"/>
+          <a:lstStyle/>
+          <a:p>
+            <a:pPr indent="0" marL="0">
+              <a:buNone/>
+            </a:pPr>
+            <a:r>
+              <a:rPr lang="en-US" sz="2900" b="1" dirty="0">
+                <a:solidFill>
+                  <a:srgbClr val="153C38"/>
+                </a:solidFill>
+              </a:rPr>
+              <a:t>どこで動き、何を境界越しに渡すか</a:t>
+            </a:r>
+            <a:endParaRPr lang="en-US" sz="2900" dirty="0"/>
+          </a:p>
+        </p:txBody>
+      </p:sp>
+      <p:graphicFrame>
+        <p:nvGraphicFramePr>
+          <p:cNvPr id="8" name="Table 0"/>
+          <p:cNvGraphicFramePr>
+            <a:graphicFrameLocks noGrp="1"/>
+          </p:cNvGraphicFramePr>
+          <p:nvPr>
+            <p:extLst>
+              <p:ext uri="{D42A27DB-BD31-4B8C-83A1-F6EECF244321}">
+                <p14:modId xmlns:p14="http://schemas.microsoft.com/office/powerpoint/2010/main" val="1579011935"/>
+              </p:ext>
+            </p:extLst>
+          </p:nvPr>
+        </p:nvGraphicFramePr>
+        <p:xfrm>
+          <a:off x="548640" y="1673352"/>
+          <a:ext cx="11064240" cy="3977640"/>
+        </p:xfrm>
+        <a:graphic>
+          <a:graphicData uri="http://schemas.openxmlformats.org/drawingml/2006/table">
+            <a:tbl>
+              <a:tblPr/>
+              <a:tblGrid>
+                <a:gridCol w="1691640"/>
+                <a:gridCol w="2606040"/>
+                <a:gridCol w="3520440"/>
+                <a:gridCol w="3246120"/>
+              </a:tblGrid>
+              <a:tr h="521208">
+                <a:tc>
+                  <a:txBody>
+                    <a:bodyPr/>
+                    <a:lstStyle/>
+                    <a:p>
+                      <a:pPr indent="0" marL="0">
+                        <a:buNone/>
+                      </a:pPr>
+                      <a:r>
+                        <a:rPr lang="en-US" sz="1300" b="1" dirty="0">
+                          <a:solidFill>
+                            <a:srgbClr val="FFFFFF"/>
+                          </a:solidFill>
+                          <a:latin typeface="Noto Sans CJK JP" pitchFamily="34" charset="0"/>
+                          <a:ea typeface="Noto Sans CJK JP" pitchFamily="34" charset="-122"/>
+                          <a:cs typeface="Noto Sans CJK JP" pitchFamily="34" charset="-120"/>
+                        </a:rPr>
+                        <a:t>境界</a:t>
+                      </a:r>
+                      <a:endParaRPr lang="en-US" sz="1300" dirty="0">
+                        <a:latin typeface="Noto Sans CJK JP" charset="0"/>
+                        <a:ea typeface="Noto Sans CJK JP" charset="0"/>
+                        <a:cs typeface="Noto Sans CJK JP" charset="0"/>
+                      </a:endParaRPr>
+                    </a:p>
+                  </a:txBody>
+                  <a:tcPr marL="54864" marR="54864" marT="54864" marB="54864" anchor="mid">
+                    <a:lnL w="7620" cap="flat" cmpd="sng" algn="ctr">
+                      <a:solidFill>
+                        <a:srgbClr val="CBD8CE"/>
+                      </a:solidFill>
+                      <a:prstDash val="solid"/>
+                      <a:round/>
+                      <a:headEnd type="none" w="med" len="med"/>
+                      <a:tailEnd type="none" w="med" len="med"/>
+                    </a:lnL>
+                    <a:lnR w="7620" cap="flat" cmpd="sng" algn="ctr">
+                      <a:solidFill>
+                        <a:srgbClr val="CBD8CE"/>
+                      </a:solidFill>
+                      <a:prstDash val="solid"/>
+                      <a:round/>
+                      <a:headEnd type="none" w="med" len="med"/>
+                      <a:tailEnd type="none" w="med" len="med"/>
+                    </a:lnR>
+                    <a:lnT w="7620" cap="flat" cmpd="sng" algn="ctr">
+                      <a:solidFill>
+                        <a:srgbClr val="CBD8CE"/>
+                      </a:solidFill>
+                      <a:prstDash val="solid"/>
+                      <a:round/>
+                      <a:headEnd type="none" w="med" len="med"/>
+                      <a:tailEnd type="none" w="med" len="med"/>
+                    </a:lnT>
+                    <a:lnB w="7620" cap="flat" cmpd="sng" algn="ctr">
+                      <a:solidFill>
+                        <a:srgbClr val="CBD8CE"/>
+                      </a:solidFill>
+                      <a:prstDash val="solid"/>
+                      <a:round/>
+                      <a:headEnd type="none" w="med" len="med"/>
+                      <a:tailEnd type="none" w="med" len="med"/>
+                    </a:lnB>
+                    <a:solidFill>
+                      <a:srgbClr val="26735F"/>
+                    </a:solidFill>
+                  </a:tcPr>
+                </a:tc>
+                <a:tc>
+                  <a:txBody>
+                    <a:bodyPr/>
+                    <a:lstStyle/>
+                    <a:p>
+                      <a:pPr indent="0" marL="0">
+                        <a:buNone/>
+                      </a:pPr>
+                      <a:r>
+                        <a:rPr lang="en-US" sz="1300" b="1" dirty="0">
+                          <a:solidFill>
+                            <a:srgbClr val="FFFFFF"/>
+                          </a:solidFill>
+                          <a:latin typeface="Noto Sans CJK JP" pitchFamily="34" charset="0"/>
+                          <a:ea typeface="Noto Sans CJK JP" pitchFamily="34" charset="-122"/>
+                          <a:cs typeface="Noto Sans CJK JP" pitchFamily="34" charset="-120"/>
+                        </a:rPr>
+                        <a:t>実装言語・実行環境</a:t>
+                      </a:r>
+                      <a:endParaRPr lang="en-US" sz="1300" dirty="0">
+                        <a:latin typeface="Noto Sans CJK JP" charset="0"/>
+                        <a:ea typeface="Noto Sans CJK JP" charset="0"/>
+                        <a:cs typeface="Noto Sans CJK JP" charset="0"/>
+                      </a:endParaRPr>
+                    </a:p>
+                  </a:txBody>
+                  <a:tcPr marL="54864" marR="54864" marT="54864" marB="54864" anchor="mid">
+                    <a:lnL w="7620" cap="flat" cmpd="sng" algn="ctr">
+                      <a:solidFill>
+                        <a:srgbClr val="CBD8CE"/>
+                      </a:solidFill>
+                      <a:prstDash val="solid"/>
+                      <a:round/>
+                      <a:headEnd type="none" w="med" len="med"/>
+                      <a:tailEnd type="none" w="med" len="med"/>
+                    </a:lnL>
+                    <a:lnR w="7620" cap="flat" cmpd="sng" algn="ctr">
+                      <a:solidFill>
+                        <a:srgbClr val="CBD8CE"/>
+                      </a:solidFill>
+                      <a:prstDash val="solid"/>
+                      <a:round/>
+                      <a:headEnd type="none" w="med" len="med"/>
+                      <a:tailEnd type="none" w="med" len="med"/>
+                    </a:lnR>
+                    <a:lnT w="7620" cap="flat" cmpd="sng" algn="ctr">
+                      <a:solidFill>
+                        <a:srgbClr val="CBD8CE"/>
+                      </a:solidFill>
+                      <a:prstDash val="solid"/>
+                      <a:round/>
+                      <a:headEnd type="none" w="med" len="med"/>
+                      <a:tailEnd type="none" w="med" len="med"/>
+                    </a:lnT>
+                    <a:lnB w="7620" cap="flat" cmpd="sng" algn="ctr">
+                      <a:solidFill>
+                        <a:srgbClr val="CBD8CE"/>
+                      </a:solidFill>
+                      <a:prstDash val="solid"/>
+                      <a:round/>
+                      <a:headEnd type="none" w="med" len="med"/>
+                      <a:tailEnd type="none" w="med" len="med"/>
+                    </a:lnB>
+                    <a:solidFill>
+                      <a:srgbClr val="26735F"/>
+                    </a:solidFill>
+                  </a:tcPr>
+                </a:tc>
+                <a:tc>
+                  <a:txBody>
+                    <a:bodyPr/>
+                    <a:lstStyle/>
+                    <a:p>
+                      <a:pPr indent="0" marL="0">
+                        <a:buNone/>
+                      </a:pPr>
+                      <a:r>
+                        <a:rPr lang="en-US" sz="1300" b="1" dirty="0">
+                          <a:solidFill>
+                            <a:srgbClr val="FFFFFF"/>
+                          </a:solidFill>
+                          <a:latin typeface="Noto Sans CJK JP" pitchFamily="34" charset="0"/>
+                          <a:ea typeface="Noto Sans CJK JP" pitchFamily="34" charset="-122"/>
+                          <a:cs typeface="Noto Sans CJK JP" pitchFamily="34" charset="-120"/>
+                        </a:rPr>
+                        <a:t>担当すること</a:t>
+                      </a:r>
+                      <a:endParaRPr lang="en-US" sz="1300" dirty="0">
+                        <a:latin typeface="Noto Sans CJK JP" charset="0"/>
+                        <a:ea typeface="Noto Sans CJK JP" charset="0"/>
+                        <a:cs typeface="Noto Sans CJK JP" charset="0"/>
+                      </a:endParaRPr>
+                    </a:p>
+                  </a:txBody>
+                  <a:tcPr marL="54864" marR="54864" marT="54864" marB="54864" anchor="mid">
+                    <a:lnL w="7620" cap="flat" cmpd="sng" algn="ctr">
+                      <a:solidFill>
+                        <a:srgbClr val="CBD8CE"/>
+                      </a:solidFill>
+                      <a:prstDash val="solid"/>
+                      <a:round/>
+                      <a:headEnd type="none" w="med" len="med"/>
+                      <a:tailEnd type="none" w="med" len="med"/>
+                    </a:lnL>
+                    <a:lnR w="7620" cap="flat" cmpd="sng" algn="ctr">
+                      <a:solidFill>
+                        <a:srgbClr val="CBD8CE"/>
+                      </a:solidFill>
+                      <a:prstDash val="solid"/>
+                      <a:round/>
+                      <a:headEnd type="none" w="med" len="med"/>
+                      <a:tailEnd type="none" w="med" len="med"/>
+                    </a:lnR>
+                    <a:lnT w="7620" cap="flat" cmpd="sng" algn="ctr">
+                      <a:solidFill>
+                        <a:srgbClr val="CBD8CE"/>
+                      </a:solidFill>
+                      <a:prstDash val="solid"/>
+                      <a:round/>
+                      <a:headEnd type="none" w="med" len="med"/>
+                      <a:tailEnd type="none" w="med" len="med"/>
+                    </a:lnT>
+                    <a:lnB w="7620" cap="flat" cmpd="sng" algn="ctr">
+                      <a:solidFill>
+                        <a:srgbClr val="CBD8CE"/>
+                      </a:solidFill>
+                      <a:prstDash val="solid"/>
+                      <a:round/>
+                      <a:headEnd type="none" w="med" len="med"/>
+                      <a:tailEnd type="none" w="med" len="med"/>
+                    </a:lnB>
+                    <a:solidFill>
+                      <a:srgbClr val="26735F"/>
+                    </a:solidFill>
+                  </a:tcPr>
+                </a:tc>
+                <a:tc>
+                  <a:txBody>
+                    <a:bodyPr/>
+                    <a:lstStyle/>
+                    <a:p>
+                      <a:pPr indent="0" marL="0">
+                        <a:buNone/>
+                      </a:pPr>
+                      <a:r>
+                        <a:rPr lang="en-US" sz="1300" b="1" dirty="0">
+                          <a:solidFill>
+                            <a:srgbClr val="FFFFFF"/>
+                          </a:solidFill>
+                          <a:latin typeface="Noto Sans CJK JP" pitchFamily="34" charset="0"/>
+                          <a:ea typeface="Noto Sans CJK JP" pitchFamily="34" charset="-122"/>
+                          <a:cs typeface="Noto Sans CJK JP" pitchFamily="34" charset="-120"/>
+                        </a:rPr>
+                        <a:t>境界を渡るデータ</a:t>
+                      </a:r>
+                      <a:endParaRPr lang="en-US" sz="1300" dirty="0">
+                        <a:latin typeface="Noto Sans CJK JP" charset="0"/>
+                        <a:ea typeface="Noto Sans CJK JP" charset="0"/>
+                        <a:cs typeface="Noto Sans CJK JP" charset="0"/>
+                      </a:endParaRPr>
+                    </a:p>
+                  </a:txBody>
+                  <a:tcPr marL="54864" marR="54864" marT="54864" marB="54864" anchor="mid">
+                    <a:lnL w="7620" cap="flat" cmpd="sng" algn="ctr">
+                      <a:solidFill>
+                        <a:srgbClr val="CBD8CE"/>
+                      </a:solidFill>
+                      <a:prstDash val="solid"/>
+                      <a:round/>
+                      <a:headEnd type="none" w="med" len="med"/>
+                      <a:tailEnd type="none" w="med" len="med"/>
+                    </a:lnL>
+                    <a:lnR w="7620" cap="flat" cmpd="sng" algn="ctr">
+                      <a:solidFill>
+                        <a:srgbClr val="CBD8CE"/>
+                      </a:solidFill>
+                      <a:prstDash val="solid"/>
+                      <a:round/>
+                      <a:headEnd type="none" w="med" len="med"/>
+                      <a:tailEnd type="none" w="med" len="med"/>
+                    </a:lnR>
+                    <a:lnT w="7620" cap="flat" cmpd="sng" algn="ctr">
+                      <a:solidFill>
+                        <a:srgbClr val="CBD8CE"/>
+                      </a:solidFill>
+                      <a:prstDash val="solid"/>
+                      <a:round/>
+                      <a:headEnd type="none" w="med" len="med"/>
+                      <a:tailEnd type="none" w="med" len="med"/>
+                    </a:lnT>
+                    <a:lnB w="7620" cap="flat" cmpd="sng" algn="ctr">
+                      <a:solidFill>
+                        <a:srgbClr val="CBD8CE"/>
+                      </a:solidFill>
+                      <a:prstDash val="solid"/>
+                      <a:round/>
+                      <a:headEnd type="none" w="med" len="med"/>
+                      <a:tailEnd type="none" w="med" len="med"/>
+                    </a:lnB>
+                    <a:solidFill>
+                      <a:srgbClr val="26735F"/>
+                    </a:solidFill>
+                  </a:tcPr>
+                </a:tc>
+              </a:tr>
+              <a:tr h="521208">
+                <a:tc>
+                  <a:txBody>
+                    <a:bodyPr/>
+                    <a:lstStyle/>
+                    <a:p>
+                      <a:pPr indent="0" marL="0">
+                        <a:buNone/>
+                      </a:pPr>
+                      <a:r>
+                        <a:rPr lang="en-US" sz="1300" dirty="0">
+                          <a:solidFill>
+                            <a:srgbClr val="153C38"/>
+                          </a:solidFill>
+                          <a:latin typeface="Noto Sans CJK JP" pitchFamily="34" charset="0"/>
+                          <a:ea typeface="Noto Sans CJK JP" pitchFamily="34" charset="-122"/>
+                          <a:cs typeface="Noto Sans CJK JP" pitchFamily="34" charset="-120"/>
+                        </a:rPr>
+                        <a:t>ブラウザー</a:t>
+                      </a:r>
+                      <a:endParaRPr lang="en-US" sz="1300" dirty="0">
+                        <a:latin typeface="Noto Sans CJK JP" charset="0"/>
+                        <a:ea typeface="Noto Sans CJK JP" charset="0"/>
+                        <a:cs typeface="Noto Sans CJK JP" charset="0"/>
+                      </a:endParaRPr>
+                    </a:p>
+                  </a:txBody>
+                  <a:tcPr marL="54864" marR="54864" marT="54864" marB="54864" anchor="mid">
+                    <a:lnL w="7620" cap="flat" cmpd="sng" algn="ctr">
+                      <a:solidFill>
+                        <a:srgbClr val="CBD8CE"/>
+                      </a:solidFill>
+                      <a:prstDash val="solid"/>
+                      <a:round/>
+                      <a:headEnd type="none" w="med" len="med"/>
+                      <a:tailEnd type="none" w="med" len="med"/>
+                    </a:lnL>
+                    <a:lnR w="7620" cap="flat" cmpd="sng" algn="ctr">
+                      <a:solidFill>
+                        <a:srgbClr val="CBD8CE"/>
+                      </a:solidFill>
+                      <a:prstDash val="solid"/>
+                      <a:round/>
+                      <a:headEnd type="none" w="med" len="med"/>
+                      <a:tailEnd type="none" w="med" len="med"/>
+                    </a:lnR>
+                    <a:lnT w="7620" cap="flat" cmpd="sng" algn="ctr">
+                      <a:solidFill>
+                        <a:srgbClr val="CBD8CE"/>
+                      </a:solidFill>
+                      <a:prstDash val="solid"/>
+                      <a:round/>
+                      <a:headEnd type="none" w="med" len="med"/>
+                      <a:tailEnd type="none" w="med" len="med"/>
+                    </a:lnT>
+                    <a:lnB w="7620" cap="flat" cmpd="sng" algn="ctr">
+                      <a:solidFill>
+                        <a:srgbClr val="CBD8CE"/>
+                      </a:solidFill>
+                      <a:prstDash val="solid"/>
+                      <a:round/>
+                      <a:headEnd type="none" w="med" len="med"/>
+                      <a:tailEnd type="none" w="med" len="med"/>
+                    </a:lnB>
+                    <a:solidFill>
+                      <a:srgbClr val="F4F6EF"/>
+                    </a:solidFill>
+                  </a:tcPr>
+                </a:tc>
+                <a:tc>
+                  <a:txBody>
+                    <a:bodyPr/>
+                    <a:lstStyle/>
+                    <a:p>
+                      <a:pPr indent="0" marL="0">
+                        <a:buNone/>
+                      </a:pPr>
+                      <a:r>
+                        <a:rPr lang="en-US" sz="1300" dirty="0">
+                          <a:solidFill>
+                            <a:srgbClr val="153C38"/>
+                          </a:solidFill>
+                          <a:latin typeface="Noto Sans CJK JP" pitchFamily="34" charset="0"/>
+                          <a:ea typeface="Noto Sans CJK JP" pitchFamily="34" charset="-122"/>
+                          <a:cs typeface="Noto Sans CJK JP" pitchFamily="34" charset="-120"/>
+                        </a:rPr>
+                        <a:t>JavaScript / HTML / CSS</a:t>
+                      </a:r>
+                      <a:endParaRPr lang="en-US" sz="1300" dirty="0">
+                        <a:latin typeface="Noto Sans CJK JP" charset="0"/>
+                        <a:ea typeface="Noto Sans CJK JP" charset="0"/>
+                        <a:cs typeface="Noto Sans CJK JP" charset="0"/>
+                      </a:endParaRPr>
+                    </a:p>
+                  </a:txBody>
+                  <a:tcPr marL="54864" marR="54864" marT="54864" marB="54864" anchor="mid">
+                    <a:lnL w="7620" cap="flat" cmpd="sng" algn="ctr">
+                      <a:solidFill>
+                        <a:srgbClr val="CBD8CE"/>
+                      </a:solidFill>
+                      <a:prstDash val="solid"/>
+                      <a:round/>
+                      <a:headEnd type="none" w="med" len="med"/>
+                      <a:tailEnd type="none" w="med" len="med"/>
+                    </a:lnL>
+                    <a:lnR w="7620" cap="flat" cmpd="sng" algn="ctr">
+                      <a:solidFill>
+                        <a:srgbClr val="CBD8CE"/>
+                      </a:solidFill>
+                      <a:prstDash val="solid"/>
+                      <a:round/>
+                      <a:headEnd type="none" w="med" len="med"/>
+                      <a:tailEnd type="none" w="med" len="med"/>
+                    </a:lnR>
+                    <a:lnT w="7620" cap="flat" cmpd="sng" algn="ctr">
+                      <a:solidFill>
+                        <a:srgbClr val="CBD8CE"/>
+                      </a:solidFill>
+                      <a:prstDash val="solid"/>
+                      <a:round/>
+                      <a:headEnd type="none" w="med" len="med"/>
+                      <a:tailEnd type="none" w="med" len="med"/>
+                    </a:lnT>
+                    <a:lnB w="7620" cap="flat" cmpd="sng" algn="ctr">
+                      <a:solidFill>
+                        <a:srgbClr val="CBD8CE"/>
+                      </a:solidFill>
+                      <a:prstDash val="solid"/>
+                      <a:round/>
+                      <a:headEnd type="none" w="med" len="med"/>
+                      <a:tailEnd type="none" w="med" len="med"/>
+                    </a:lnB>
+                    <a:solidFill>
+                      <a:srgbClr val="F4F6EF"/>
+                    </a:solidFill>
+                  </a:tcPr>
+                </a:tc>
+                <a:tc>
+                  <a:txBody>
+                    <a:bodyPr/>
+                    <a:lstStyle/>
+                    <a:p>
+                      <a:pPr indent="0" marL="0">
+                        <a:buNone/>
+                      </a:pPr>
+                      <a:r>
+                        <a:rPr lang="en-US" sz="1300" dirty="0">
+                          <a:solidFill>
+                            <a:srgbClr val="153C38"/>
+                          </a:solidFill>
+                          <a:latin typeface="Noto Sans CJK JP" pitchFamily="34" charset="0"/>
+                          <a:ea typeface="Noto Sans CJK JP" pitchFamily="34" charset="-122"/>
+                          <a:cs typeface="Noto Sans CJK JP" pitchFamily="34" charset="-120"/>
+                        </a:rPr>
+                        <a:t>公開：7神経・Q学習</a:t>
+                      </a:r>
+                      <a:endParaRPr lang="en-US" sz="1300" dirty="0">
+                        <a:latin typeface="Noto Sans CJK JP" charset="0"/>
+                        <a:ea typeface="Noto Sans CJK JP" charset="0"/>
+                        <a:cs typeface="Noto Sans CJK JP" charset="0"/>
+                      </a:endParaRPr>
+                    </a:p>
+                    <a:p>
+                      <a:pPr indent="0" marL="0">
+                        <a:buNone/>
+                      </a:pPr>
+                      <a:r>
+                        <a:rPr lang="en-US" sz="1300" dirty="0">
+                          <a:solidFill>
+                            <a:srgbClr val="153C38"/>
+                          </a:solidFill>
+                          <a:latin typeface="Noto Sans CJK JP" pitchFamily="34" charset="0"/>
+                          <a:ea typeface="Noto Sans CJK JP" pitchFamily="34" charset="-122"/>
+                          <a:cs typeface="Noto Sans CJK JP" pitchFamily="34" charset="-120"/>
+                        </a:rPr>
+                        <a:t>全神経版：操作・表示</a:t>
+                      </a:r>
+                      <a:endParaRPr lang="en-US" sz="1300" dirty="0">
+                        <a:latin typeface="Noto Sans CJK JP" charset="0"/>
+                        <a:ea typeface="Noto Sans CJK JP" charset="0"/>
+                        <a:cs typeface="Noto Sans CJK JP" charset="0"/>
+                      </a:endParaRPr>
+                    </a:p>
+                  </a:txBody>
+                  <a:tcPr marL="54864" marR="54864" marT="54864" marB="54864" anchor="mid">
+                    <a:lnL w="7620" cap="flat" cmpd="sng" algn="ctr">
+                      <a:solidFill>
+                        <a:srgbClr val="CBD8CE"/>
+                      </a:solidFill>
+                      <a:prstDash val="solid"/>
+                      <a:round/>
+                      <a:headEnd type="none" w="med" len="med"/>
+                      <a:tailEnd type="none" w="med" len="med"/>
+                    </a:lnL>
+                    <a:lnR w="7620" cap="flat" cmpd="sng" algn="ctr">
+                      <a:solidFill>
+                        <a:srgbClr val="CBD8CE"/>
+                      </a:solidFill>
+                      <a:prstDash val="solid"/>
+                      <a:round/>
+                      <a:headEnd type="none" w="med" len="med"/>
+                      <a:tailEnd type="none" w="med" len="med"/>
+                    </a:lnR>
+                    <a:lnT w="7620" cap="flat" cmpd="sng" algn="ctr">
+                      <a:solidFill>
+                        <a:srgbClr val="CBD8CE"/>
+                      </a:solidFill>
+                      <a:prstDash val="solid"/>
+                      <a:round/>
+                      <a:headEnd type="none" w="med" len="med"/>
+                      <a:tailEnd type="none" w="med" len="med"/>
+                    </a:lnT>
+                    <a:lnB w="7620" cap="flat" cmpd="sng" algn="ctr">
+                      <a:solidFill>
+                        <a:srgbClr val="CBD8CE"/>
+                      </a:solidFill>
+                      <a:prstDash val="solid"/>
+                      <a:round/>
+                      <a:headEnd type="none" w="med" len="med"/>
+                      <a:tailEnd type="none" w="med" len="med"/>
+                    </a:lnB>
+                    <a:solidFill>
+                      <a:srgbClr val="F4F6EF"/>
+                    </a:solidFill>
+                  </a:tcPr>
+                </a:tc>
+                <a:tc>
+                  <a:txBody>
+                    <a:bodyPr/>
+                    <a:lstStyle/>
+                    <a:p>
+                      <a:pPr indent="0" marL="0">
+                        <a:buNone/>
+                      </a:pPr>
+                      <a:r>
+                        <a:rPr lang="en-US" sz="1300" dirty="0">
+                          <a:solidFill>
+                            <a:srgbClr val="153C38"/>
+                          </a:solidFill>
+                          <a:latin typeface="Noto Sans CJK JP" pitchFamily="34" charset="0"/>
+                          <a:ea typeface="Noto Sans CJK JP" pitchFamily="34" charset="-122"/>
+                          <a:cs typeface="Noto Sans CJK JP" pitchFamily="34" charset="-120"/>
+                        </a:rPr>
+                        <a:t>HTTP / JSON</a:t>
+                      </a:r>
+                      <a:endParaRPr lang="en-US" sz="1300" dirty="0">
+                        <a:latin typeface="Noto Sans CJK JP" charset="0"/>
+                        <a:ea typeface="Noto Sans CJK JP" charset="0"/>
+                        <a:cs typeface="Noto Sans CJK JP" charset="0"/>
+                      </a:endParaRPr>
+                    </a:p>
+                    <a:p>
+                      <a:pPr indent="0" marL="0">
+                        <a:buNone/>
+                      </a:pPr>
+                      <a:r>
+                        <a:rPr lang="en-US" sz="1300" dirty="0">
+                          <a:solidFill>
+                            <a:srgbClr val="153C38"/>
+                          </a:solidFill>
+                          <a:latin typeface="Noto Sans CJK JP" pitchFamily="34" charset="0"/>
+                          <a:ea typeface="Noto Sans CJK JP" pitchFamily="34" charset="-122"/>
+                          <a:cs typeface="Noto Sans CJK JP" pitchFamily="34" charset="-120"/>
+                        </a:rPr>
+                        <a:t>確定入力・表示状態</a:t>
+                      </a:r>
+                      <a:endParaRPr lang="en-US" sz="1300" dirty="0">
+                        <a:latin typeface="Noto Sans CJK JP" charset="0"/>
+                        <a:ea typeface="Noto Sans CJK JP" charset="0"/>
+                        <a:cs typeface="Noto Sans CJK JP" charset="0"/>
+                      </a:endParaRPr>
+                    </a:p>
+                  </a:txBody>
+                  <a:tcPr marL="54864" marR="54864" marT="54864" marB="54864" anchor="mid">
+                    <a:lnL w="7620" cap="flat" cmpd="sng" algn="ctr">
+                      <a:solidFill>
+                        <a:srgbClr val="CBD8CE"/>
+                      </a:solidFill>
+                      <a:prstDash val="solid"/>
+                      <a:round/>
+                      <a:headEnd type="none" w="med" len="med"/>
+                      <a:tailEnd type="none" w="med" len="med"/>
+                    </a:lnL>
+                    <a:lnR w="7620" cap="flat" cmpd="sng" algn="ctr">
+                      <a:solidFill>
+                        <a:srgbClr val="CBD8CE"/>
+                      </a:solidFill>
+                      <a:prstDash val="solid"/>
+                      <a:round/>
+                      <a:headEnd type="none" w="med" len="med"/>
+                      <a:tailEnd type="none" w="med" len="med"/>
+                    </a:lnR>
+                    <a:lnT w="7620" cap="flat" cmpd="sng" algn="ctr">
+                      <a:solidFill>
+                        <a:srgbClr val="CBD8CE"/>
+                      </a:solidFill>
+                      <a:prstDash val="solid"/>
+                      <a:round/>
+                      <a:headEnd type="none" w="med" len="med"/>
+                      <a:tailEnd type="none" w="med" len="med"/>
+                    </a:lnT>
+                    <a:lnB w="7620" cap="flat" cmpd="sng" algn="ctr">
+                      <a:solidFill>
+                        <a:srgbClr val="CBD8CE"/>
+                      </a:solidFill>
+                      <a:prstDash val="solid"/>
+                      <a:round/>
+                      <a:headEnd type="none" w="med" len="med"/>
+                      <a:tailEnd type="none" w="med" len="med"/>
+                    </a:lnB>
+                    <a:solidFill>
+                      <a:srgbClr val="F4F6EF"/>
+                    </a:solidFill>
+                  </a:tcPr>
+                </a:tc>
+              </a:tr>
+              <a:tr h="521208">
+                <a:tc>
+                  <a:txBody>
+                    <a:bodyPr/>
+                    <a:lstStyle/>
+                    <a:p>
+                      <a:pPr indent="0" marL="0">
+                        <a:buNone/>
+                      </a:pPr>
+                      <a:r>
+                        <a:rPr lang="en-US" sz="1300" dirty="0">
+                          <a:solidFill>
+                            <a:srgbClr val="153C38"/>
+                          </a:solidFill>
+                          <a:latin typeface="Noto Sans CJK JP" pitchFamily="34" charset="0"/>
+                          <a:ea typeface="Noto Sans CJK JP" pitchFamily="34" charset="-122"/>
+                          <a:cs typeface="Noto Sans CJK JP" pitchFamily="34" charset="-120"/>
+                        </a:rPr>
+                        <a:t>読取ゲートウェイ</a:t>
+                      </a:r>
+                      <a:endParaRPr lang="en-US" sz="1300" dirty="0">
+                        <a:latin typeface="Noto Sans CJK JP" charset="0"/>
+                        <a:ea typeface="Noto Sans CJK JP" charset="0"/>
+                        <a:cs typeface="Noto Sans CJK JP" charset="0"/>
+                      </a:endParaRPr>
+                    </a:p>
+                  </a:txBody>
+                  <a:tcPr marL="54864" marR="54864" marT="54864" marB="54864" anchor="mid">
+                    <a:lnL w="7620" cap="flat" cmpd="sng" algn="ctr">
+                      <a:solidFill>
+                        <a:srgbClr val="CBD8CE"/>
+                      </a:solidFill>
+                      <a:prstDash val="solid"/>
+                      <a:round/>
+                      <a:headEnd type="none" w="med" len="med"/>
+                      <a:tailEnd type="none" w="med" len="med"/>
+                    </a:lnL>
+                    <a:lnR w="7620" cap="flat" cmpd="sng" algn="ctr">
+                      <a:solidFill>
+                        <a:srgbClr val="CBD8CE"/>
+                      </a:solidFill>
+                      <a:prstDash val="solid"/>
+                      <a:round/>
+                      <a:headEnd type="none" w="med" len="med"/>
+                      <a:tailEnd type="none" w="med" len="med"/>
+                    </a:lnR>
+                    <a:lnT w="7620" cap="flat" cmpd="sng" algn="ctr">
+                      <a:solidFill>
+                        <a:srgbClr val="CBD8CE"/>
+                      </a:solidFill>
+                      <a:prstDash val="solid"/>
+                      <a:round/>
+                      <a:headEnd type="none" w="med" len="med"/>
+                      <a:tailEnd type="none" w="med" len="med"/>
+                    </a:lnT>
+                    <a:lnB w="7620" cap="flat" cmpd="sng" algn="ctr">
+                      <a:solidFill>
+                        <a:srgbClr val="CBD8CE"/>
+                      </a:solidFill>
+                      <a:prstDash val="solid"/>
+                      <a:round/>
+                      <a:headEnd type="none" w="med" len="med"/>
+                      <a:tailEnd type="none" w="med" len="med"/>
+                    </a:lnB>
+                    <a:solidFill>
+                      <a:srgbClr val="F4F6EF"/>
+                    </a:solidFill>
+                  </a:tcPr>
+                </a:tc>
+                <a:tc>
+                  <a:txBody>
+                    <a:bodyPr/>
+                    <a:lstStyle/>
+                    <a:p>
+                      <a:pPr indent="0" marL="0">
+                        <a:buNone/>
+                      </a:pPr>
+                      <a:r>
+                        <a:rPr lang="en-US" sz="1300" dirty="0">
+                          <a:solidFill>
+                            <a:srgbClr val="153C38"/>
+                          </a:solidFill>
+                          <a:latin typeface="Noto Sans CJK JP" pitchFamily="34" charset="0"/>
+                          <a:ea typeface="Noto Sans CJK JP" pitchFamily="34" charset="-122"/>
+                          <a:cs typeface="Noto Sans CJK JP" pitchFamily="34" charset="-120"/>
+                        </a:rPr>
+                        <a:t>JavaScript</a:t>
+                      </a:r>
+                      <a:endParaRPr lang="en-US" sz="1300" dirty="0">
+                        <a:latin typeface="Noto Sans CJK JP" charset="0"/>
+                        <a:ea typeface="Noto Sans CJK JP" charset="0"/>
+                        <a:cs typeface="Noto Sans CJK JP" charset="0"/>
+                      </a:endParaRPr>
+                    </a:p>
+                    <a:p>
+                      <a:pPr indent="0" marL="0">
+                        <a:buNone/>
+                      </a:pPr>
+                      <a:r>
+                        <a:rPr lang="en-US" sz="1300" dirty="0">
+                          <a:solidFill>
+                            <a:srgbClr val="153C38"/>
+                          </a:solidFill>
+                          <a:latin typeface="Noto Sans CJK JP" pitchFamily="34" charset="0"/>
+                          <a:ea typeface="Noto Sans CJK JP" pitchFamily="34" charset="-122"/>
+                          <a:cs typeface="Noto Sans CJK JP" pitchFamily="34" charset="-120"/>
+                        </a:rPr>
+                        <a:t>Cloudflare Workers</a:t>
+                      </a:r>
+                      <a:endParaRPr lang="en-US" sz="1300" dirty="0">
+                        <a:latin typeface="Noto Sans CJK JP" charset="0"/>
+                        <a:ea typeface="Noto Sans CJK JP" charset="0"/>
+                        <a:cs typeface="Noto Sans CJK JP" charset="0"/>
+                      </a:endParaRPr>
+                    </a:p>
+                  </a:txBody>
+                  <a:tcPr marL="54864" marR="54864" marT="54864" marB="54864" anchor="mid">
+                    <a:lnL w="7620" cap="flat" cmpd="sng" algn="ctr">
+                      <a:solidFill>
+                        <a:srgbClr val="CBD8CE"/>
+                      </a:solidFill>
+                      <a:prstDash val="solid"/>
+                      <a:round/>
+                      <a:headEnd type="none" w="med" len="med"/>
+                      <a:tailEnd type="none" w="med" len="med"/>
+                    </a:lnL>
+                    <a:lnR w="7620" cap="flat" cmpd="sng" algn="ctr">
+                      <a:solidFill>
+                        <a:srgbClr val="CBD8CE"/>
+                      </a:solidFill>
+                      <a:prstDash val="solid"/>
+                      <a:round/>
+                      <a:headEnd type="none" w="med" len="med"/>
+                      <a:tailEnd type="none" w="med" len="med"/>
+                    </a:lnR>
+                    <a:lnT w="7620" cap="flat" cmpd="sng" algn="ctr">
+                      <a:solidFill>
+                        <a:srgbClr val="CBD8CE"/>
+                      </a:solidFill>
+                      <a:prstDash val="solid"/>
+                      <a:round/>
+                      <a:headEnd type="none" w="med" len="med"/>
+                      <a:tailEnd type="none" w="med" len="med"/>
+                    </a:lnT>
+                    <a:lnB w="7620" cap="flat" cmpd="sng" algn="ctr">
+                      <a:solidFill>
+                        <a:srgbClr val="CBD8CE"/>
+                      </a:solidFill>
+                      <a:prstDash val="solid"/>
+                      <a:round/>
+                      <a:headEnd type="none" w="med" len="med"/>
+                      <a:tailEnd type="none" w="med" len="med"/>
+                    </a:lnB>
+                    <a:solidFill>
+                      <a:srgbClr val="F4F6EF"/>
+                    </a:solidFill>
+                  </a:tcPr>
+                </a:tc>
+                <a:tc>
+                  <a:txBody>
+                    <a:bodyPr/>
+                    <a:lstStyle/>
+                    <a:p>
+                      <a:pPr indent="0" marL="0">
+                        <a:buNone/>
+                      </a:pPr>
+                      <a:r>
+                        <a:rPr lang="en-US" sz="1300" dirty="0">
+                          <a:solidFill>
+                            <a:srgbClr val="153C38"/>
+                          </a:solidFill>
+                          <a:latin typeface="Noto Sans CJK JP" pitchFamily="34" charset="0"/>
+                          <a:ea typeface="Noto Sans CJK JP" pitchFamily="34" charset="-122"/>
+                          <a:cs typeface="Noto Sans CJK JP" pitchFamily="34" charset="-120"/>
+                        </a:rPr>
+                        <a:t>receipt・イベント検証</a:t>
+                      </a:r>
+                      <a:endParaRPr lang="en-US" sz="1300" dirty="0">
+                        <a:latin typeface="Noto Sans CJK JP" charset="0"/>
+                        <a:ea typeface="Noto Sans CJK JP" charset="0"/>
+                        <a:cs typeface="Noto Sans CJK JP" charset="0"/>
+                      </a:endParaRPr>
+                    </a:p>
+                    <a:p>
+                      <a:pPr indent="0" marL="0">
+                        <a:buNone/>
+                      </a:pPr>
+                      <a:r>
+                        <a:rPr lang="en-US" sz="1300" dirty="0">
+                          <a:solidFill>
+                            <a:srgbClr val="153C38"/>
+                          </a:solidFill>
+                          <a:latin typeface="Noto Sans CJK JP" pitchFamily="34" charset="0"/>
+                          <a:ea typeface="Noto Sans CJK JP" pitchFamily="34" charset="-122"/>
+                          <a:cs typeface="Noto Sans CJK JP" pitchFamily="34" charset="-120"/>
+                        </a:rPr>
+                        <a:t>Anvilも読取処理を共有</a:t>
+                      </a:r>
+                      <a:endParaRPr lang="en-US" sz="1300" dirty="0">
+                        <a:latin typeface="Noto Sans CJK JP" charset="0"/>
+                        <a:ea typeface="Noto Sans CJK JP" charset="0"/>
+                        <a:cs typeface="Noto Sans CJK JP" charset="0"/>
+                      </a:endParaRPr>
+                    </a:p>
+                  </a:txBody>
+                  <a:tcPr marL="54864" marR="54864" marT="54864" marB="54864" anchor="mid">
+                    <a:lnL w="7620" cap="flat" cmpd="sng" algn="ctr">
+                      <a:solidFill>
+                        <a:srgbClr val="CBD8CE"/>
+                      </a:solidFill>
+                      <a:prstDash val="solid"/>
+                      <a:round/>
+                      <a:headEnd type="none" w="med" len="med"/>
+                      <a:tailEnd type="none" w="med" len="med"/>
+                    </a:lnL>
+                    <a:lnR w="7620" cap="flat" cmpd="sng" algn="ctr">
+                      <a:solidFill>
+                        <a:srgbClr val="CBD8CE"/>
+                      </a:solidFill>
+                      <a:prstDash val="solid"/>
+                      <a:round/>
+                      <a:headEnd type="none" w="med" len="med"/>
+                      <a:tailEnd type="none" w="med" len="med"/>
+                    </a:lnR>
+                    <a:lnT w="7620" cap="flat" cmpd="sng" algn="ctr">
+                      <a:solidFill>
+                        <a:srgbClr val="CBD8CE"/>
+                      </a:solidFill>
+                      <a:prstDash val="solid"/>
+                      <a:round/>
+                      <a:headEnd type="none" w="med" len="med"/>
+                      <a:tailEnd type="none" w="med" len="med"/>
+                    </a:lnT>
+                    <a:lnB w="7620" cap="flat" cmpd="sng" algn="ctr">
+                      <a:solidFill>
+                        <a:srgbClr val="CBD8CE"/>
+                      </a:solidFill>
+                      <a:prstDash val="solid"/>
+                      <a:round/>
+                      <a:headEnd type="none" w="med" len="med"/>
+                      <a:tailEnd type="none" w="med" len="med"/>
+                    </a:lnB>
+                    <a:solidFill>
+                      <a:srgbClr val="F4F6EF"/>
+                    </a:solidFill>
+                  </a:tcPr>
+                </a:tc>
+                <a:tc>
+                  <a:txBody>
+                    <a:bodyPr/>
+                    <a:lstStyle/>
+                    <a:p>
+                      <a:pPr indent="0" marL="0">
+                        <a:buNone/>
+                      </a:pPr>
+                      <a:r>
+                        <a:rPr lang="en-US" sz="1300" dirty="0">
+                          <a:solidFill>
+                            <a:srgbClr val="153C38"/>
+                          </a:solidFill>
+                          <a:latin typeface="Noto Sans CJK JP" pitchFamily="34" charset="0"/>
+                          <a:ea typeface="Noto Sans CJK JP" pitchFamily="34" charset="-122"/>
+                          <a:cs typeface="Noto Sans CJK JP" pitchFamily="34" charset="-120"/>
+                        </a:rPr>
+                        <a:t>JSON-RPC</a:t>
+                      </a:r>
+                      <a:endParaRPr lang="en-US" sz="1300" dirty="0">
+                        <a:latin typeface="Noto Sans CJK JP" charset="0"/>
+                        <a:ea typeface="Noto Sans CJK JP" charset="0"/>
+                        <a:cs typeface="Noto Sans CJK JP" charset="0"/>
+                      </a:endParaRPr>
+                    </a:p>
+                    <a:p>
+                      <a:pPr indent="0" marL="0">
+                        <a:buNone/>
+                      </a:pPr>
+                      <a:r>
+                        <a:rPr lang="en-US" sz="1300" dirty="0">
+                          <a:solidFill>
+                            <a:srgbClr val="153C38"/>
+                          </a:solidFill>
+                          <a:latin typeface="Noto Sans CJK JP" pitchFamily="34" charset="0"/>
+                          <a:ea typeface="Noto Sans CJK JP" pitchFamily="34" charset="-122"/>
+                          <a:cs typeface="Noto Sans CJK JP" pitchFamily="34" charset="-120"/>
+                        </a:rPr>
+                        <a:t>ブロック・logs・receipt</a:t>
+                      </a:r>
+                      <a:endParaRPr lang="en-US" sz="1300" dirty="0">
+                        <a:latin typeface="Noto Sans CJK JP" charset="0"/>
+                        <a:ea typeface="Noto Sans CJK JP" charset="0"/>
+                        <a:cs typeface="Noto Sans CJK JP" charset="0"/>
+                      </a:endParaRPr>
+                    </a:p>
+                  </a:txBody>
+                  <a:tcPr marL="54864" marR="54864" marT="54864" marB="54864" anchor="mid">
+                    <a:lnL w="7620" cap="flat" cmpd="sng" algn="ctr">
+                      <a:solidFill>
+                        <a:srgbClr val="CBD8CE"/>
+                      </a:solidFill>
+                      <a:prstDash val="solid"/>
+                      <a:round/>
+                      <a:headEnd type="none" w="med" len="med"/>
+                      <a:tailEnd type="none" w="med" len="med"/>
+                    </a:lnL>
+                    <a:lnR w="7620" cap="flat" cmpd="sng" algn="ctr">
+                      <a:solidFill>
+                        <a:srgbClr val="CBD8CE"/>
+                      </a:solidFill>
+                      <a:prstDash val="solid"/>
+                      <a:round/>
+                      <a:headEnd type="none" w="med" len="med"/>
+                      <a:tailEnd type="none" w="med" len="med"/>
+                    </a:lnR>
+                    <a:lnT w="7620" cap="flat" cmpd="sng" algn="ctr">
+                      <a:solidFill>
+                        <a:srgbClr val="CBD8CE"/>
+                      </a:solidFill>
+                      <a:prstDash val="solid"/>
+                      <a:round/>
+                      <a:headEnd type="none" w="med" len="med"/>
+                      <a:tailEnd type="none" w="med" len="med"/>
+                    </a:lnT>
+                    <a:lnB w="7620" cap="flat" cmpd="sng" algn="ctr">
+                      <a:solidFill>
+                        <a:srgbClr val="CBD8CE"/>
+                      </a:solidFill>
+                      <a:prstDash val="solid"/>
+                      <a:round/>
+                      <a:headEnd type="none" w="med" len="med"/>
+                      <a:tailEnd type="none" w="med" len="med"/>
+                    </a:lnB>
+                    <a:solidFill>
+                      <a:srgbClr val="F4F6EF"/>
+                    </a:solidFill>
+                  </a:tcPr>
+                </a:tc>
+              </a:tr>
+              <a:tr h="521208">
+                <a:tc>
+                  <a:txBody>
+                    <a:bodyPr/>
+                    <a:lstStyle/>
+                    <a:p>
+                      <a:pPr indent="0" marL="0">
+                        <a:buNone/>
+                      </a:pPr>
+                      <a:r>
+                        <a:rPr lang="en-US" sz="1300" dirty="0">
+                          <a:solidFill>
+                            <a:srgbClr val="153C38"/>
+                          </a:solidFill>
+                          <a:latin typeface="Noto Sans CJK JP" pitchFamily="34" charset="0"/>
+                          <a:ea typeface="Noto Sans CJK JP" pitchFamily="34" charset="-122"/>
+                          <a:cs typeface="Noto Sans CJK JP" pitchFamily="34" charset="-120"/>
+                        </a:rPr>
+                        <a:t>署名者</a:t>
+                      </a:r>
+                      <a:endParaRPr lang="en-US" sz="1300" dirty="0">
+                        <a:latin typeface="Noto Sans CJK JP" charset="0"/>
+                        <a:ea typeface="Noto Sans CJK JP" charset="0"/>
+                        <a:cs typeface="Noto Sans CJK JP" charset="0"/>
+                      </a:endParaRPr>
+                    </a:p>
+                  </a:txBody>
+                  <a:tcPr marL="54864" marR="54864" marT="54864" marB="54864" anchor="mid">
+                    <a:lnL w="7620" cap="flat" cmpd="sng" algn="ctr">
+                      <a:solidFill>
+                        <a:srgbClr val="CBD8CE"/>
+                      </a:solidFill>
+                      <a:prstDash val="solid"/>
+                      <a:round/>
+                      <a:headEnd type="none" w="med" len="med"/>
+                      <a:tailEnd type="none" w="med" len="med"/>
+                    </a:lnL>
+                    <a:lnR w="7620" cap="flat" cmpd="sng" algn="ctr">
+                      <a:solidFill>
+                        <a:srgbClr val="CBD8CE"/>
+                      </a:solidFill>
+                      <a:prstDash val="solid"/>
+                      <a:round/>
+                      <a:headEnd type="none" w="med" len="med"/>
+                      <a:tailEnd type="none" w="med" len="med"/>
+                    </a:lnR>
+                    <a:lnT w="7620" cap="flat" cmpd="sng" algn="ctr">
+                      <a:solidFill>
+                        <a:srgbClr val="CBD8CE"/>
+                      </a:solidFill>
+                      <a:prstDash val="solid"/>
+                      <a:round/>
+                      <a:headEnd type="none" w="med" len="med"/>
+                      <a:tailEnd type="none" w="med" len="med"/>
+                    </a:lnT>
+                    <a:lnB w="7620" cap="flat" cmpd="sng" algn="ctr">
+                      <a:solidFill>
+                        <a:srgbClr val="CBD8CE"/>
+                      </a:solidFill>
+                      <a:prstDash val="solid"/>
+                      <a:round/>
+                      <a:headEnd type="none" w="med" len="med"/>
+                      <a:tailEnd type="none" w="med" len="med"/>
+                    </a:lnB>
+                    <a:solidFill>
+                      <a:srgbClr val="F4F6EF"/>
+                    </a:solidFill>
+                  </a:tcPr>
+                </a:tc>
+                <a:tc>
+                  <a:txBody>
+                    <a:bodyPr/>
+                    <a:lstStyle/>
+                    <a:p>
+                      <a:pPr indent="0" marL="0">
+                        <a:buNone/>
+                      </a:pPr>
+                      <a:r>
+                        <a:rPr lang="en-US" sz="1300" dirty="0">
+                          <a:solidFill>
+                            <a:srgbClr val="153C38"/>
+                          </a:solidFill>
+                          <a:latin typeface="Noto Sans CJK JP" pitchFamily="34" charset="0"/>
+                          <a:ea typeface="Noto Sans CJK JP" pitchFamily="34" charset="-122"/>
+                          <a:cs typeface="Noto Sans CJK JP" pitchFamily="34" charset="-120"/>
+                        </a:rPr>
+                        <a:t>JavaScript + ethers</a:t>
+                      </a:r>
+                      <a:endParaRPr lang="en-US" sz="1300" dirty="0">
+                        <a:latin typeface="Noto Sans CJK JP" charset="0"/>
+                        <a:ea typeface="Noto Sans CJK JP" charset="0"/>
+                        <a:cs typeface="Noto Sans CJK JP" charset="0"/>
+                      </a:endParaRPr>
+                    </a:p>
+                    <a:p>
+                      <a:pPr indent="0" marL="0">
+                        <a:buNone/>
+                      </a:pPr>
+                      <a:r>
+                        <a:rPr lang="en-US" sz="1300" dirty="0">
+                          <a:solidFill>
+                            <a:srgbClr val="153C38"/>
+                          </a:solidFill>
+                          <a:latin typeface="Noto Sans CJK JP" pitchFamily="34" charset="0"/>
+                          <a:ea typeface="Noto Sans CJK JP" pitchFamily="34" charset="-122"/>
+                          <a:cs typeface="Noto Sans CJK JP" pitchFamily="34" charset="-120"/>
+                        </a:rPr>
+                        <a:t>Worker / wallet / Anvil</a:t>
+                      </a:r>
+                      <a:endParaRPr lang="en-US" sz="1300" dirty="0">
+                        <a:latin typeface="Noto Sans CJK JP" charset="0"/>
+                        <a:ea typeface="Noto Sans CJK JP" charset="0"/>
+                        <a:cs typeface="Noto Sans CJK JP" charset="0"/>
+                      </a:endParaRPr>
+                    </a:p>
+                  </a:txBody>
+                  <a:tcPr marL="54864" marR="54864" marT="54864" marB="54864" anchor="mid">
+                    <a:lnL w="7620" cap="flat" cmpd="sng" algn="ctr">
+                      <a:solidFill>
+                        <a:srgbClr val="CBD8CE"/>
+                      </a:solidFill>
+                      <a:prstDash val="solid"/>
+                      <a:round/>
+                      <a:headEnd type="none" w="med" len="med"/>
+                      <a:tailEnd type="none" w="med" len="med"/>
+                    </a:lnL>
+                    <a:lnR w="7620" cap="flat" cmpd="sng" algn="ctr">
+                      <a:solidFill>
+                        <a:srgbClr val="CBD8CE"/>
+                      </a:solidFill>
+                      <a:prstDash val="solid"/>
+                      <a:round/>
+                      <a:headEnd type="none" w="med" len="med"/>
+                      <a:tailEnd type="none" w="med" len="med"/>
+                    </a:lnR>
+                    <a:lnT w="7620" cap="flat" cmpd="sng" algn="ctr">
+                      <a:solidFill>
+                        <a:srgbClr val="CBD8CE"/>
+                      </a:solidFill>
+                      <a:prstDash val="solid"/>
+                      <a:round/>
+                      <a:headEnd type="none" w="med" len="med"/>
+                      <a:tailEnd type="none" w="med" len="med"/>
+                    </a:lnT>
+                    <a:lnB w="7620" cap="flat" cmpd="sng" algn="ctr">
+                      <a:solidFill>
+                        <a:srgbClr val="CBD8CE"/>
+                      </a:solidFill>
+                      <a:prstDash val="solid"/>
+                      <a:round/>
+                      <a:headEnd type="none" w="med" len="med"/>
+                      <a:tailEnd type="none" w="med" len="med"/>
+                    </a:lnB>
+                    <a:solidFill>
+                      <a:srgbClr val="F4F6EF"/>
+                    </a:solidFill>
+                  </a:tcPr>
+                </a:tc>
+                <a:tc>
+                  <a:txBody>
+                    <a:bodyPr/>
+                    <a:lstStyle/>
+                    <a:p>
+                      <a:pPr indent="0" marL="0">
+                        <a:buNone/>
+                      </a:pPr>
+                      <a:r>
+                        <a:rPr lang="en-US" sz="1300" dirty="0">
+                          <a:solidFill>
+                            <a:srgbClr val="153C38"/>
+                          </a:solidFill>
+                          <a:latin typeface="Noto Sans CJK JP" pitchFamily="34" charset="0"/>
+                          <a:ea typeface="Noto Sans CJK JP" pitchFamily="34" charset="-122"/>
+                          <a:cs typeface="Noto Sans CJK JP" pitchFamily="34" charset="-120"/>
+                        </a:rPr>
+                        <a:t>所有者の権限でTX送信</a:t>
+                      </a:r>
+                      <a:endParaRPr lang="en-US" sz="1300" dirty="0">
+                        <a:latin typeface="Noto Sans CJK JP" charset="0"/>
+                        <a:ea typeface="Noto Sans CJK JP" charset="0"/>
+                        <a:cs typeface="Noto Sans CJK JP" charset="0"/>
+                      </a:endParaRPr>
+                    </a:p>
+                    <a:p>
+                      <a:pPr indent="0" marL="0">
+                        <a:buNone/>
+                      </a:pPr>
+                      <a:r>
+                        <a:rPr lang="en-US" sz="1300" dirty="0">
+                          <a:solidFill>
+                            <a:srgbClr val="153C38"/>
+                          </a:solidFill>
+                          <a:latin typeface="Noto Sans CJK JP" pitchFamily="34" charset="0"/>
+                          <a:ea typeface="Noto Sans CJK JP" pitchFamily="34" charset="-122"/>
+                          <a:cs typeface="Noto Sans CJK JP" pitchFamily="34" charset="-120"/>
+                        </a:rPr>
+                        <a:t>定期送信は予算を制限</a:t>
+                      </a:r>
+                      <a:endParaRPr lang="en-US" sz="1300" dirty="0">
+                        <a:latin typeface="Noto Sans CJK JP" charset="0"/>
+                        <a:ea typeface="Noto Sans CJK JP" charset="0"/>
+                        <a:cs typeface="Noto Sans CJK JP" charset="0"/>
+                      </a:endParaRPr>
+                    </a:p>
+                  </a:txBody>
+                  <a:tcPr marL="54864" marR="54864" marT="54864" marB="54864" anchor="mid">
+                    <a:lnL w="7620" cap="flat" cmpd="sng" algn="ctr">
+                      <a:solidFill>
+                        <a:srgbClr val="CBD8CE"/>
+                      </a:solidFill>
+                      <a:prstDash val="solid"/>
+                      <a:round/>
+                      <a:headEnd type="none" w="med" len="med"/>
+                      <a:tailEnd type="none" w="med" len="med"/>
+                    </a:lnL>
+                    <a:lnR w="7620" cap="flat" cmpd="sng" algn="ctr">
+                      <a:solidFill>
+                        <a:srgbClr val="CBD8CE"/>
+                      </a:solidFill>
+                      <a:prstDash val="solid"/>
+                      <a:round/>
+                      <a:headEnd type="none" w="med" len="med"/>
+                      <a:tailEnd type="none" w="med" len="med"/>
+                    </a:lnR>
+                    <a:lnT w="7620" cap="flat" cmpd="sng" algn="ctr">
+                      <a:solidFill>
+                        <a:srgbClr val="CBD8CE"/>
+                      </a:solidFill>
+                      <a:prstDash val="solid"/>
+                      <a:round/>
+                      <a:headEnd type="none" w="med" len="med"/>
+                      <a:tailEnd type="none" w="med" len="med"/>
+                    </a:lnT>
+                    <a:lnB w="7620" cap="flat" cmpd="sng" algn="ctr">
+                      <a:solidFill>
+                        <a:srgbClr val="CBD8CE"/>
+                      </a:solidFill>
+                      <a:prstDash val="solid"/>
+                      <a:round/>
+                      <a:headEnd type="none" w="med" len="med"/>
+                      <a:tailEnd type="none" w="med" len="med"/>
+                    </a:lnB>
+                    <a:solidFill>
+                      <a:srgbClr val="F4F6EF"/>
+                    </a:solidFill>
+                  </a:tcPr>
+                </a:tc>
+                <a:tc>
+                  <a:txBody>
+                    <a:bodyPr/>
+                    <a:lstStyle/>
+                    <a:p>
+                      <a:pPr indent="0" marL="0">
+                        <a:buNone/>
+                      </a:pPr>
+                      <a:r>
+                        <a:rPr lang="en-US" sz="1300" dirty="0">
+                          <a:solidFill>
+                            <a:srgbClr val="153C38"/>
+                          </a:solidFill>
+                          <a:latin typeface="Noto Sans CJK JP" pitchFamily="34" charset="0"/>
+                          <a:ea typeface="Noto Sans CJK JP" pitchFamily="34" charset="-122"/>
+                          <a:cs typeface="Noto Sans CJK JP" pitchFamily="34" charset="-120"/>
+                        </a:rPr>
+                        <a:t>ABI・署名付きTX</a:t>
+                      </a:r>
+                      <a:endParaRPr lang="en-US" sz="1300" dirty="0">
+                        <a:latin typeface="Noto Sans CJK JP" charset="0"/>
+                        <a:ea typeface="Noto Sans CJK JP" charset="0"/>
+                        <a:cs typeface="Noto Sans CJK JP" charset="0"/>
+                      </a:endParaRPr>
+                    </a:p>
+                    <a:p>
+                      <a:pPr indent="0" marL="0">
+                        <a:buNone/>
+                      </a:pPr>
+                      <a:r>
+                        <a:rPr lang="en-US" sz="1300" dirty="0">
+                          <a:solidFill>
+                            <a:srgbClr val="153C38"/>
+                          </a:solidFill>
+                          <a:latin typeface="Noto Sans CJK JP" pitchFamily="34" charset="0"/>
+                          <a:ea typeface="Noto Sans CJK JP" pitchFamily="34" charset="-122"/>
+                          <a:cs typeface="Noto Sans CJK JP" pitchFamily="34" charset="-120"/>
+                        </a:rPr>
+                        <a:t>秘密鍵はブラウザーへ返さない</a:t>
+                      </a:r>
+                      <a:endParaRPr lang="en-US" sz="1300" dirty="0">
+                        <a:latin typeface="Noto Sans CJK JP" charset="0"/>
+                        <a:ea typeface="Noto Sans CJK JP" charset="0"/>
+                        <a:cs typeface="Noto Sans CJK JP" charset="0"/>
+                      </a:endParaRPr>
+                    </a:p>
+                  </a:txBody>
+                  <a:tcPr marL="54864" marR="54864" marT="54864" marB="54864" anchor="mid">
+                    <a:lnL w="7620" cap="flat" cmpd="sng" algn="ctr">
+                      <a:solidFill>
+                        <a:srgbClr val="CBD8CE"/>
+                      </a:solidFill>
+                      <a:prstDash val="solid"/>
+                      <a:round/>
+                      <a:headEnd type="none" w="med" len="med"/>
+                      <a:tailEnd type="none" w="med" len="med"/>
+                    </a:lnL>
+                    <a:lnR w="7620" cap="flat" cmpd="sng" algn="ctr">
+                      <a:solidFill>
+                        <a:srgbClr val="CBD8CE"/>
+                      </a:solidFill>
+                      <a:prstDash val="solid"/>
+                      <a:round/>
+                      <a:headEnd type="none" w="med" len="med"/>
+                      <a:tailEnd type="none" w="med" len="med"/>
+                    </a:lnR>
+                    <a:lnT w="7620" cap="flat" cmpd="sng" algn="ctr">
+                      <a:solidFill>
+                        <a:srgbClr val="CBD8CE"/>
+                      </a:solidFill>
+                      <a:prstDash val="solid"/>
+                      <a:round/>
+                      <a:headEnd type="none" w="med" len="med"/>
+                      <a:tailEnd type="none" w="med" len="med"/>
+                    </a:lnT>
+                    <a:lnB w="7620" cap="flat" cmpd="sng" algn="ctr">
+                      <a:solidFill>
+                        <a:srgbClr val="CBD8CE"/>
+                      </a:solidFill>
+                      <a:prstDash val="solid"/>
+                      <a:round/>
+                      <a:headEnd type="none" w="med" len="med"/>
+                      <a:tailEnd type="none" w="med" len="med"/>
+                    </a:lnB>
+                    <a:solidFill>
+                      <a:srgbClr val="F4F6EF"/>
+                    </a:solidFill>
+                  </a:tcPr>
+                </a:tc>
+              </a:tr>
+              <a:tr h="521208">
+                <a:tc>
+                  <a:txBody>
+                    <a:bodyPr/>
+                    <a:lstStyle/>
+                    <a:p>
+                      <a:pPr indent="0" marL="0">
+                        <a:buNone/>
+                      </a:pPr>
+                      <a:r>
+                        <a:rPr lang="en-US" sz="1300" dirty="0">
+                          <a:solidFill>
+                            <a:srgbClr val="153C38"/>
+                          </a:solidFill>
+                          <a:latin typeface="Noto Sans CJK JP" pitchFamily="34" charset="0"/>
+                          <a:ea typeface="Noto Sans CJK JP" pitchFamily="34" charset="-122"/>
+                          <a:cs typeface="Noto Sans CJK JP" pitchFamily="34" charset="-120"/>
+                        </a:rPr>
+                        <a:t>ローカル制御</a:t>
+                      </a:r>
+                      <a:endParaRPr lang="en-US" sz="1300" dirty="0">
+                        <a:latin typeface="Noto Sans CJK JP" charset="0"/>
+                        <a:ea typeface="Noto Sans CJK JP" charset="0"/>
+                        <a:cs typeface="Noto Sans CJK JP" charset="0"/>
+                      </a:endParaRPr>
+                    </a:p>
+                  </a:txBody>
+                  <a:tcPr marL="54864" marR="54864" marT="54864" marB="54864" anchor="mid">
+                    <a:lnL w="7620" cap="flat" cmpd="sng" algn="ctr">
+                      <a:solidFill>
+                        <a:srgbClr val="CBD8CE"/>
+                      </a:solidFill>
+                      <a:prstDash val="solid"/>
+                      <a:round/>
+                      <a:headEnd type="none" w="med" len="med"/>
+                      <a:tailEnd type="none" w="med" len="med"/>
+                    </a:lnL>
+                    <a:lnR w="7620" cap="flat" cmpd="sng" algn="ctr">
+                      <a:solidFill>
+                        <a:srgbClr val="CBD8CE"/>
+                      </a:solidFill>
+                      <a:prstDash val="solid"/>
+                      <a:round/>
+                      <a:headEnd type="none" w="med" len="med"/>
+                      <a:tailEnd type="none" w="med" len="med"/>
+                    </a:lnR>
+                    <a:lnT w="7620" cap="flat" cmpd="sng" algn="ctr">
+                      <a:solidFill>
+                        <a:srgbClr val="CBD8CE"/>
+                      </a:solidFill>
+                      <a:prstDash val="solid"/>
+                      <a:round/>
+                      <a:headEnd type="none" w="med" len="med"/>
+                      <a:tailEnd type="none" w="med" len="med"/>
+                    </a:lnT>
+                    <a:lnB w="7620" cap="flat" cmpd="sng" algn="ctr">
+                      <a:solidFill>
+                        <a:srgbClr val="CBD8CE"/>
+                      </a:solidFill>
+                      <a:prstDash val="solid"/>
+                      <a:round/>
+                      <a:headEnd type="none" w="med" len="med"/>
+                      <a:tailEnd type="none" w="med" len="med"/>
+                    </a:lnB>
+                    <a:solidFill>
+                      <a:srgbClr val="F4F6EF"/>
+                    </a:solidFill>
+                  </a:tcPr>
+                </a:tc>
+                <a:tc>
+                  <a:txBody>
+                    <a:bodyPr/>
+                    <a:lstStyle/>
+                    <a:p>
+                      <a:pPr indent="0" marL="0">
+                        <a:buNone/>
+                      </a:pPr>
+                      <a:r>
+                        <a:rPr lang="en-US" sz="1300" dirty="0">
+                          <a:solidFill>
+                            <a:srgbClr val="153C38"/>
+                          </a:solidFill>
+                          <a:latin typeface="Noto Sans CJK JP" pitchFamily="34" charset="0"/>
+                          <a:ea typeface="Noto Sans CJK JP" pitchFamily="34" charset="-122"/>
+                          <a:cs typeface="Noto Sans CJK JP" pitchFamily="34" charset="-120"/>
+                        </a:rPr>
+                        <a:t>JavaScript / Node.js</a:t>
+                      </a:r>
+                      <a:endParaRPr lang="en-US" sz="1300" dirty="0">
+                        <a:latin typeface="Noto Sans CJK JP" charset="0"/>
+                        <a:ea typeface="Noto Sans CJK JP" charset="0"/>
+                        <a:cs typeface="Noto Sans CJK JP" charset="0"/>
+                      </a:endParaRPr>
+                    </a:p>
+                  </a:txBody>
+                  <a:tcPr marL="54864" marR="54864" marT="54864" marB="54864" anchor="mid">
+                    <a:lnL w="7620" cap="flat" cmpd="sng" algn="ctr">
+                      <a:solidFill>
+                        <a:srgbClr val="CBD8CE"/>
+                      </a:solidFill>
+                      <a:prstDash val="solid"/>
+                      <a:round/>
+                      <a:headEnd type="none" w="med" len="med"/>
+                      <a:tailEnd type="none" w="med" len="med"/>
+                    </a:lnL>
+                    <a:lnR w="7620" cap="flat" cmpd="sng" algn="ctr">
+                      <a:solidFill>
+                        <a:srgbClr val="CBD8CE"/>
+                      </a:solidFill>
+                      <a:prstDash val="solid"/>
+                      <a:round/>
+                      <a:headEnd type="none" w="med" len="med"/>
+                      <a:tailEnd type="none" w="med" len="med"/>
+                    </a:lnR>
+                    <a:lnT w="7620" cap="flat" cmpd="sng" algn="ctr">
+                      <a:solidFill>
+                        <a:srgbClr val="CBD8CE"/>
+                      </a:solidFill>
+                      <a:prstDash val="solid"/>
+                      <a:round/>
+                      <a:headEnd type="none" w="med" len="med"/>
+                      <a:tailEnd type="none" w="med" len="med"/>
+                    </a:lnT>
+                    <a:lnB w="7620" cap="flat" cmpd="sng" algn="ctr">
+                      <a:solidFill>
+                        <a:srgbClr val="CBD8CE"/>
+                      </a:solidFill>
+                      <a:prstDash val="solid"/>
+                      <a:round/>
+                      <a:headEnd type="none" w="med" len="med"/>
+                      <a:tailEnd type="none" w="med" len="med"/>
+                    </a:lnB>
+                    <a:solidFill>
+                      <a:srgbClr val="F4F6EF"/>
+                    </a:solidFill>
+                  </a:tcPr>
+                </a:tc>
+                <a:tc>
+                  <a:txBody>
+                    <a:bodyPr/>
+                    <a:lstStyle/>
+                    <a:p>
+                      <a:pPr indent="0" marL="0">
+                        <a:buNone/>
+                      </a:pPr>
+                      <a:r>
+                        <a:rPr lang="en-US" sz="1300" dirty="0">
+                          <a:solidFill>
+                            <a:srgbClr val="153C38"/>
+                          </a:solidFill>
+                          <a:latin typeface="Noto Sans CJK JP" pitchFamily="34" charset="0"/>
+                          <a:ea typeface="Noto Sans CJK JP" pitchFamily="34" charset="-122"/>
+                          <a:cs typeface="Noto Sans CJK JP" pitchFamily="34" charset="-120"/>
+                        </a:rPr>
+                        <a:t>全神経の世界・報酬・発注</a:t>
+                      </a:r>
+                      <a:endParaRPr lang="en-US" sz="1300" dirty="0">
+                        <a:latin typeface="Noto Sans CJK JP" charset="0"/>
+                        <a:ea typeface="Noto Sans CJK JP" charset="0"/>
+                        <a:cs typeface="Noto Sans CJK JP" charset="0"/>
+                      </a:endParaRPr>
+                    </a:p>
+                    <a:p>
+                      <a:pPr indent="0" marL="0">
+                        <a:buNone/>
+                      </a:pPr>
+                      <a:r>
+                        <a:rPr lang="en-US" sz="1300" dirty="0">
+                          <a:solidFill>
+                            <a:srgbClr val="153C38"/>
+                          </a:solidFill>
+                          <a:latin typeface="Noto Sans CJK JP" pitchFamily="34" charset="0"/>
+                          <a:ea typeface="Noto Sans CJK JP" pitchFamily="34" charset="-122"/>
+                          <a:cs typeface="Noto Sans CJK JP" pitchFamily="34" charset="-120"/>
+                        </a:rPr>
+                        <a:t>通常コードが経路を比較</a:t>
+                      </a:r>
+                      <a:endParaRPr lang="en-US" sz="1300" dirty="0">
+                        <a:latin typeface="Noto Sans CJK JP" charset="0"/>
+                        <a:ea typeface="Noto Sans CJK JP" charset="0"/>
+                        <a:cs typeface="Noto Sans CJK JP" charset="0"/>
+                      </a:endParaRPr>
+                    </a:p>
+                  </a:txBody>
+                  <a:tcPr marL="54864" marR="54864" marT="54864" marB="54864" anchor="mid">
+                    <a:lnL w="7620" cap="flat" cmpd="sng" algn="ctr">
+                      <a:solidFill>
+                        <a:srgbClr val="CBD8CE"/>
+                      </a:solidFill>
+                      <a:prstDash val="solid"/>
+                      <a:round/>
+                      <a:headEnd type="none" w="med" len="med"/>
+                      <a:tailEnd type="none" w="med" len="med"/>
+                    </a:lnL>
+                    <a:lnR w="7620" cap="flat" cmpd="sng" algn="ctr">
+                      <a:solidFill>
+                        <a:srgbClr val="CBD8CE"/>
+                      </a:solidFill>
+                      <a:prstDash val="solid"/>
+                      <a:round/>
+                      <a:headEnd type="none" w="med" len="med"/>
+                      <a:tailEnd type="none" w="med" len="med"/>
+                    </a:lnR>
+                    <a:lnT w="7620" cap="flat" cmpd="sng" algn="ctr">
+                      <a:solidFill>
+                        <a:srgbClr val="CBD8CE"/>
+                      </a:solidFill>
+                      <a:prstDash val="solid"/>
+                      <a:round/>
+                      <a:headEnd type="none" w="med" len="med"/>
+                      <a:tailEnd type="none" w="med" len="med"/>
+                    </a:lnT>
+                    <a:lnB w="7620" cap="flat" cmpd="sng" algn="ctr">
+                      <a:solidFill>
+                        <a:srgbClr val="CBD8CE"/>
+                      </a:solidFill>
+                      <a:prstDash val="solid"/>
+                      <a:round/>
+                      <a:headEnd type="none" w="med" len="med"/>
+                      <a:tailEnd type="none" w="med" len="med"/>
+                    </a:lnB>
+                    <a:solidFill>
+                      <a:srgbClr val="F4F6EF"/>
+                    </a:solidFill>
+                  </a:tcPr>
+                </a:tc>
+                <a:tc>
+                  <a:txBody>
+                    <a:bodyPr/>
+                    <a:lstStyle/>
+                    <a:p>
+                      <a:pPr indent="0" marL="0">
+                        <a:buNone/>
+                      </a:pPr>
+                      <a:r>
+                        <a:rPr lang="en-US" sz="1300" dirty="0">
+                          <a:solidFill>
+                            <a:srgbClr val="153C38"/>
+                          </a:solidFill>
+                          <a:latin typeface="Noto Sans CJK JP" pitchFamily="34" charset="0"/>
+                          <a:ea typeface="Noto Sans CJK JP" pitchFamily="34" charset="-122"/>
+                          <a:cs typeface="Noto Sans CJK JP" pitchFamily="34" charset="-120"/>
+                        </a:rPr>
+                        <a:t>HTTP / JSON ↔ UI</a:t>
+                      </a:r>
+                      <a:endParaRPr lang="en-US" sz="1300" dirty="0">
+                        <a:latin typeface="Noto Sans CJK JP" charset="0"/>
+                        <a:ea typeface="Noto Sans CJK JP" charset="0"/>
+                        <a:cs typeface="Noto Sans CJK JP" charset="0"/>
+                      </a:endParaRPr>
+                    </a:p>
+                    <a:p>
+                      <a:pPr indent="0" marL="0">
+                        <a:buNone/>
+                      </a:pPr>
+                      <a:r>
+                        <a:rPr lang="en-US" sz="1300" dirty="0">
+                          <a:solidFill>
+                            <a:srgbClr val="153C38"/>
+                          </a:solidFill>
+                          <a:latin typeface="Noto Sans CJK JP" pitchFamily="34" charset="0"/>
+                          <a:ea typeface="Noto Sans CJK JP" pitchFamily="34" charset="-122"/>
+                          <a:cs typeface="Noto Sans CJK JP" pitchFamily="34" charset="-120"/>
+                        </a:rPr>
+                        <a:t>JSON Lines ↔ Python</a:t>
+                      </a:r>
+                      <a:endParaRPr lang="en-US" sz="1300" dirty="0">
+                        <a:latin typeface="Noto Sans CJK JP" charset="0"/>
+                        <a:ea typeface="Noto Sans CJK JP" charset="0"/>
+                        <a:cs typeface="Noto Sans CJK JP" charset="0"/>
+                      </a:endParaRPr>
+                    </a:p>
+                  </a:txBody>
+                  <a:tcPr marL="54864" marR="54864" marT="54864" marB="54864" anchor="mid">
+                    <a:lnL w="7620" cap="flat" cmpd="sng" algn="ctr">
+                      <a:solidFill>
+                        <a:srgbClr val="CBD8CE"/>
+                      </a:solidFill>
+                      <a:prstDash val="solid"/>
+                      <a:round/>
+                      <a:headEnd type="none" w="med" len="med"/>
+                      <a:tailEnd type="none" w="med" len="med"/>
+                    </a:lnL>
+                    <a:lnR w="7620" cap="flat" cmpd="sng" algn="ctr">
+                      <a:solidFill>
+                        <a:srgbClr val="CBD8CE"/>
+                      </a:solidFill>
+                      <a:prstDash val="solid"/>
+                      <a:round/>
+                      <a:headEnd type="none" w="med" len="med"/>
+                      <a:tailEnd type="none" w="med" len="med"/>
+                    </a:lnR>
+                    <a:lnT w="7620" cap="flat" cmpd="sng" algn="ctr">
+                      <a:solidFill>
+                        <a:srgbClr val="CBD8CE"/>
+                      </a:solidFill>
+                      <a:prstDash val="solid"/>
+                      <a:round/>
+                      <a:headEnd type="none" w="med" len="med"/>
+                      <a:tailEnd type="none" w="med" len="med"/>
+                    </a:lnT>
+                    <a:lnB w="7620" cap="flat" cmpd="sng" algn="ctr">
+                      <a:solidFill>
+                        <a:srgbClr val="CBD8CE"/>
+                      </a:solidFill>
+                      <a:prstDash val="solid"/>
+                      <a:round/>
+                      <a:headEnd type="none" w="med" len="med"/>
+                      <a:tailEnd type="none" w="med" len="med"/>
+                    </a:lnB>
+                    <a:solidFill>
+                      <a:srgbClr val="F4F6EF"/>
+                    </a:solidFill>
+                  </a:tcPr>
+                </a:tc>
+              </a:tr>
+              <a:tr h="521208">
+                <a:tc>
+                  <a:txBody>
+                    <a:bodyPr/>
+                    <a:lstStyle/>
+                    <a:p>
+                      <a:pPr indent="0" marL="0">
+                        <a:buNone/>
+                      </a:pPr>
+                      <a:r>
+                        <a:rPr lang="en-US" sz="1300" dirty="0">
+                          <a:solidFill>
+                            <a:srgbClr val="153C38"/>
+                          </a:solidFill>
+                          <a:latin typeface="Noto Sans CJK JP" pitchFamily="34" charset="0"/>
+                          <a:ea typeface="Noto Sans CJK JP" pitchFamily="34" charset="-122"/>
+                          <a:cs typeface="Noto Sans CJK JP" pitchFamily="34" charset="-120"/>
+                        </a:rPr>
+                        <a:t>全神経ランタイム</a:t>
+                      </a:r>
+                      <a:endParaRPr lang="en-US" sz="1300" dirty="0">
+                        <a:latin typeface="Noto Sans CJK JP" charset="0"/>
+                        <a:ea typeface="Noto Sans CJK JP" charset="0"/>
+                        <a:cs typeface="Noto Sans CJK JP" charset="0"/>
+                      </a:endParaRPr>
+                    </a:p>
+                  </a:txBody>
+                  <a:tcPr marL="54864" marR="54864" marT="54864" marB="54864" anchor="mid">
+                    <a:lnL w="7620" cap="flat" cmpd="sng" algn="ctr">
+                      <a:solidFill>
+                        <a:srgbClr val="CBD8CE"/>
+                      </a:solidFill>
+                      <a:prstDash val="solid"/>
+                      <a:round/>
+                      <a:headEnd type="none" w="med" len="med"/>
+                      <a:tailEnd type="none" w="med" len="med"/>
+                    </a:lnL>
+                    <a:lnR w="7620" cap="flat" cmpd="sng" algn="ctr">
+                      <a:solidFill>
+                        <a:srgbClr val="CBD8CE"/>
+                      </a:solidFill>
+                      <a:prstDash val="solid"/>
+                      <a:round/>
+                      <a:headEnd type="none" w="med" len="med"/>
+                      <a:tailEnd type="none" w="med" len="med"/>
+                    </a:lnR>
+                    <a:lnT w="7620" cap="flat" cmpd="sng" algn="ctr">
+                      <a:solidFill>
+                        <a:srgbClr val="CBD8CE"/>
+                      </a:solidFill>
+                      <a:prstDash val="solid"/>
+                      <a:round/>
+                      <a:headEnd type="none" w="med" len="med"/>
+                      <a:tailEnd type="none" w="med" len="med"/>
+                    </a:lnT>
+                    <a:lnB w="7620" cap="flat" cmpd="sng" algn="ctr">
+                      <a:solidFill>
+                        <a:srgbClr val="CBD8CE"/>
+                      </a:solidFill>
+                      <a:prstDash val="solid"/>
+                      <a:round/>
+                      <a:headEnd type="none" w="med" len="med"/>
+                      <a:tailEnd type="none" w="med" len="med"/>
+                    </a:lnB>
+                    <a:solidFill>
+                      <a:srgbClr val="F4F6EF"/>
+                    </a:solidFill>
+                  </a:tcPr>
+                </a:tc>
+                <a:tc>
+                  <a:txBody>
+                    <a:bodyPr/>
+                    <a:lstStyle/>
+                    <a:p>
+                      <a:pPr indent="0" marL="0">
+                        <a:buNone/>
+                      </a:pPr>
+                      <a:r>
+                        <a:rPr lang="en-US" sz="1300" dirty="0">
+                          <a:solidFill>
+                            <a:srgbClr val="153C38"/>
+                          </a:solidFill>
+                          <a:latin typeface="Noto Sans CJK JP" pitchFamily="34" charset="0"/>
+                          <a:ea typeface="Noto Sans CJK JP" pitchFamily="34" charset="-122"/>
+                          <a:cs typeface="Noto Sans CJK JP" pitchFamily="34" charset="-120"/>
+                        </a:rPr>
+                        <a:t>Python / NumPy / SciPy</a:t>
+                      </a:r>
+                      <a:endParaRPr lang="en-US" sz="1300" dirty="0">
+                        <a:latin typeface="Noto Sans CJK JP" charset="0"/>
+                        <a:ea typeface="Noto Sans CJK JP" charset="0"/>
+                        <a:cs typeface="Noto Sans CJK JP" charset="0"/>
+                      </a:endParaRPr>
+                    </a:p>
+                  </a:txBody>
+                  <a:tcPr marL="54864" marR="54864" marT="54864" marB="54864" anchor="mid">
+                    <a:lnL w="7620" cap="flat" cmpd="sng" algn="ctr">
+                      <a:solidFill>
+                        <a:srgbClr val="CBD8CE"/>
+                      </a:solidFill>
+                      <a:prstDash val="solid"/>
+                      <a:round/>
+                      <a:headEnd type="none" w="med" len="med"/>
+                      <a:tailEnd type="none" w="med" len="med"/>
+                    </a:lnL>
+                    <a:lnR w="7620" cap="flat" cmpd="sng" algn="ctr">
+                      <a:solidFill>
+                        <a:srgbClr val="CBD8CE"/>
+                      </a:solidFill>
+                      <a:prstDash val="solid"/>
+                      <a:round/>
+                      <a:headEnd type="none" w="med" len="med"/>
+                      <a:tailEnd type="none" w="med" len="med"/>
+                    </a:lnR>
+                    <a:lnT w="7620" cap="flat" cmpd="sng" algn="ctr">
+                      <a:solidFill>
+                        <a:srgbClr val="CBD8CE"/>
+                      </a:solidFill>
+                      <a:prstDash val="solid"/>
+                      <a:round/>
+                      <a:headEnd type="none" w="med" len="med"/>
+                      <a:tailEnd type="none" w="med" len="med"/>
+                    </a:lnT>
+                    <a:lnB w="7620" cap="flat" cmpd="sng" algn="ctr">
+                      <a:solidFill>
+                        <a:srgbClr val="CBD8CE"/>
+                      </a:solidFill>
+                      <a:prstDash val="solid"/>
+                      <a:round/>
+                      <a:headEnd type="none" w="med" len="med"/>
+                      <a:tailEnd type="none" w="med" len="med"/>
+                    </a:lnB>
+                    <a:solidFill>
+                      <a:srgbClr val="F4F6EF"/>
+                    </a:solidFill>
+                  </a:tcPr>
+                </a:tc>
+                <a:tc>
+                  <a:txBody>
+                    <a:bodyPr/>
+                    <a:lstStyle/>
+                    <a:p>
+                      <a:pPr indent="0" marL="0">
+                        <a:buNone/>
+                      </a:pPr>
+                      <a:r>
+                        <a:rPr lang="en-US" sz="1300" dirty="0">
+                          <a:solidFill>
+                            <a:srgbClr val="153C38"/>
+                          </a:solidFill>
+                          <a:latin typeface="Noto Sans CJK JP" pitchFamily="34" charset="0"/>
+                          <a:ea typeface="Noto Sans CJK JP" pitchFamily="34" charset="-122"/>
+                          <a:cs typeface="Noto Sans CJK JP" pitchFamily="34" charset="-120"/>
+                        </a:rPr>
+                        <a:t>166,700神経・行動readout</a:t>
+                      </a:r>
+                      <a:endParaRPr lang="en-US" sz="1300" dirty="0">
+                        <a:latin typeface="Noto Sans CJK JP" charset="0"/>
+                        <a:ea typeface="Noto Sans CJK JP" charset="0"/>
+                        <a:cs typeface="Noto Sans CJK JP" charset="0"/>
+                      </a:endParaRPr>
+                    </a:p>
+                    <a:p>
+                      <a:pPr indent="0" marL="0">
+                        <a:buNone/>
+                      </a:pPr>
+                      <a:r>
+                        <a:rPr lang="en-US" sz="1300" dirty="0">
+                          <a:solidFill>
+                            <a:srgbClr val="153C38"/>
+                          </a:solidFill>
+                          <a:latin typeface="Noto Sans CJK JP" pitchFamily="34" charset="0"/>
+                          <a:ea typeface="Noto Sans CJK JP" pitchFamily="34" charset="-122"/>
+                          <a:cs typeface="Noto Sans CJK JP" pitchFamily="34" charset="-120"/>
+                        </a:rPr>
+                        <a:t>採餌の選択／市場の更新</a:t>
+                      </a:r>
+                      <a:endParaRPr lang="en-US" sz="1300" dirty="0">
+                        <a:latin typeface="Noto Sans CJK JP" charset="0"/>
+                        <a:ea typeface="Noto Sans CJK JP" charset="0"/>
+                        <a:cs typeface="Noto Sans CJK JP" charset="0"/>
+                      </a:endParaRPr>
+                    </a:p>
+                  </a:txBody>
+                  <a:tcPr marL="54864" marR="54864" marT="54864" marB="54864" anchor="mid">
+                    <a:lnL w="7620" cap="flat" cmpd="sng" algn="ctr">
+                      <a:solidFill>
+                        <a:srgbClr val="CBD8CE"/>
+                      </a:solidFill>
+                      <a:prstDash val="solid"/>
+                      <a:round/>
+                      <a:headEnd type="none" w="med" len="med"/>
+                      <a:tailEnd type="none" w="med" len="med"/>
+                    </a:lnL>
+                    <a:lnR w="7620" cap="flat" cmpd="sng" algn="ctr">
+                      <a:solidFill>
+                        <a:srgbClr val="CBD8CE"/>
+                      </a:solidFill>
+                      <a:prstDash val="solid"/>
+                      <a:round/>
+                      <a:headEnd type="none" w="med" len="med"/>
+                      <a:tailEnd type="none" w="med" len="med"/>
+                    </a:lnR>
+                    <a:lnT w="7620" cap="flat" cmpd="sng" algn="ctr">
+                      <a:solidFill>
+                        <a:srgbClr val="CBD8CE"/>
+                      </a:solidFill>
+                      <a:prstDash val="solid"/>
+                      <a:round/>
+                      <a:headEnd type="none" w="med" len="med"/>
+                      <a:tailEnd type="none" w="med" len="med"/>
+                    </a:lnT>
+                    <a:lnB w="7620" cap="flat" cmpd="sng" algn="ctr">
+                      <a:solidFill>
+                        <a:srgbClr val="CBD8CE"/>
+                      </a:solidFill>
+                      <a:prstDash val="solid"/>
+                      <a:round/>
+                      <a:headEnd type="none" w="med" len="med"/>
+                      <a:tailEnd type="none" w="med" len="med"/>
+                    </a:lnB>
+                    <a:solidFill>
+                      <a:srgbClr val="F4F6EF"/>
+                    </a:solidFill>
+                  </a:tcPr>
+                </a:tc>
+                <a:tc>
+                  <a:txBody>
+                    <a:bodyPr/>
+                    <a:lstStyle/>
+                    <a:p>
+                      <a:pPr indent="0" marL="0">
+                        <a:buNone/>
+                      </a:pPr>
+                      <a:r>
+                        <a:rPr lang="en-US" sz="1300" dirty="0">
+                          <a:solidFill>
+                            <a:srgbClr val="153C38"/>
+                          </a:solidFill>
+                          <a:latin typeface="Noto Sans CJK JP" pitchFamily="34" charset="0"/>
+                          <a:ea typeface="Noto Sans CJK JP" pitchFamily="34" charset="-122"/>
+                          <a:cs typeface="Noto Sans CJK JP" pitchFamily="34" charset="-120"/>
+                        </a:rPr>
+                        <a:t>数値入力 → 行動</a:t>
+                      </a:r>
+                      <a:endParaRPr lang="en-US" sz="1300" dirty="0">
+                        <a:latin typeface="Noto Sans CJK JP" charset="0"/>
+                        <a:ea typeface="Noto Sans CJK JP" charset="0"/>
+                        <a:cs typeface="Noto Sans CJK JP" charset="0"/>
+                      </a:endParaRPr>
+                    </a:p>
+                    <a:p>
+                      <a:pPr indent="0" marL="0">
+                        <a:buNone/>
+                      </a:pPr>
+                      <a:r>
+                        <a:rPr lang="en-US" sz="1300" dirty="0">
+                          <a:solidFill>
+                            <a:srgbClr val="153C38"/>
+                          </a:solidFill>
+                          <a:latin typeface="Noto Sans CJK JP" pitchFamily="34" charset="0"/>
+                          <a:ea typeface="Noto Sans CJK JP" pitchFamily="34" charset="-122"/>
+                          <a:cs typeface="Noto Sans CJK JP" pitchFamily="34" charset="-120"/>
+                        </a:rPr>
+                        <a:t>結果 → 学習・保存</a:t>
+                      </a:r>
+                      <a:endParaRPr lang="en-US" sz="1300" dirty="0">
+                        <a:latin typeface="Noto Sans CJK JP" charset="0"/>
+                        <a:ea typeface="Noto Sans CJK JP" charset="0"/>
+                        <a:cs typeface="Noto Sans CJK JP" charset="0"/>
+                      </a:endParaRPr>
+                    </a:p>
+                  </a:txBody>
+                  <a:tcPr marL="54864" marR="54864" marT="54864" marB="54864" anchor="mid">
+                    <a:lnL w="7620" cap="flat" cmpd="sng" algn="ctr">
+                      <a:solidFill>
+                        <a:srgbClr val="CBD8CE"/>
+                      </a:solidFill>
+                      <a:prstDash val="solid"/>
+                      <a:round/>
+                      <a:headEnd type="none" w="med" len="med"/>
+                      <a:tailEnd type="none" w="med" len="med"/>
+                    </a:lnL>
+                    <a:lnR w="7620" cap="flat" cmpd="sng" algn="ctr">
+                      <a:solidFill>
+                        <a:srgbClr val="CBD8CE"/>
+                      </a:solidFill>
+                      <a:prstDash val="solid"/>
+                      <a:round/>
+                      <a:headEnd type="none" w="med" len="med"/>
+                      <a:tailEnd type="none" w="med" len="med"/>
+                    </a:lnR>
+                    <a:lnT w="7620" cap="flat" cmpd="sng" algn="ctr">
+                      <a:solidFill>
+                        <a:srgbClr val="CBD8CE"/>
+                      </a:solidFill>
+                      <a:prstDash val="solid"/>
+                      <a:round/>
+                      <a:headEnd type="none" w="med" len="med"/>
+                      <a:tailEnd type="none" w="med" len="med"/>
+                    </a:lnT>
+                    <a:lnB w="7620" cap="flat" cmpd="sng" algn="ctr">
+                      <a:solidFill>
+                        <a:srgbClr val="CBD8CE"/>
+                      </a:solidFill>
+                      <a:prstDash val="solid"/>
+                      <a:round/>
+                      <a:headEnd type="none" w="med" len="med"/>
+                      <a:tailEnd type="none" w="med" len="med"/>
+                    </a:lnB>
+                    <a:solidFill>
+                      <a:srgbClr val="F4F6EF"/>
+                    </a:solidFill>
+                  </a:tcPr>
+                </a:tc>
+              </a:tr>
+              <a:tr h="521208">
+                <a:tc>
+                  <a:txBody>
+                    <a:bodyPr/>
+                    <a:lstStyle/>
+                    <a:p>
+                      <a:pPr indent="0" marL="0">
+                        <a:buNone/>
+                      </a:pPr>
+                      <a:r>
+                        <a:rPr lang="en-US" sz="1300" dirty="0">
+                          <a:solidFill>
+                            <a:srgbClr val="153C38"/>
+                          </a:solidFill>
+                          <a:latin typeface="Noto Sans CJK JP" pitchFamily="34" charset="0"/>
+                          <a:ea typeface="Noto Sans CJK JP" pitchFamily="34" charset="-122"/>
+                          <a:cs typeface="Noto Sans CJK JP" pitchFamily="34" charset="-120"/>
+                        </a:rPr>
+                        <a:t>EVMコントラクト</a:t>
+                      </a:r>
+                      <a:endParaRPr lang="en-US" sz="1300" dirty="0">
+                        <a:latin typeface="Noto Sans CJK JP" charset="0"/>
+                        <a:ea typeface="Noto Sans CJK JP" charset="0"/>
+                        <a:cs typeface="Noto Sans CJK JP" charset="0"/>
+                      </a:endParaRPr>
+                    </a:p>
+                  </a:txBody>
+                  <a:tcPr marL="54864" marR="54864" marT="54864" marB="54864" anchor="mid">
+                    <a:lnL w="7620" cap="flat" cmpd="sng" algn="ctr">
+                      <a:solidFill>
+                        <a:srgbClr val="CBD8CE"/>
+                      </a:solidFill>
+                      <a:prstDash val="solid"/>
+                      <a:round/>
+                      <a:headEnd type="none" w="med" len="med"/>
+                      <a:tailEnd type="none" w="med" len="med"/>
+                    </a:lnL>
+                    <a:lnR w="7620" cap="flat" cmpd="sng" algn="ctr">
+                      <a:solidFill>
+                        <a:srgbClr val="CBD8CE"/>
+                      </a:solidFill>
+                      <a:prstDash val="solid"/>
+                      <a:round/>
+                      <a:headEnd type="none" w="med" len="med"/>
+                      <a:tailEnd type="none" w="med" len="med"/>
+                    </a:lnR>
+                    <a:lnT w="7620" cap="flat" cmpd="sng" algn="ctr">
+                      <a:solidFill>
+                        <a:srgbClr val="CBD8CE"/>
+                      </a:solidFill>
+                      <a:prstDash val="solid"/>
+                      <a:round/>
+                      <a:headEnd type="none" w="med" len="med"/>
+                      <a:tailEnd type="none" w="med" len="med"/>
+                    </a:lnT>
+                    <a:lnB w="7620" cap="flat" cmpd="sng" algn="ctr">
+                      <a:solidFill>
+                        <a:srgbClr val="CBD8CE"/>
+                      </a:solidFill>
+                      <a:prstDash val="solid"/>
+                      <a:round/>
+                      <a:headEnd type="none" w="med" len="med"/>
+                      <a:tailEnd type="none" w="med" len="med"/>
+                    </a:lnB>
+                    <a:solidFill>
+                      <a:srgbClr val="F4F6EF"/>
+                    </a:solidFill>
+                  </a:tcPr>
+                </a:tc>
+                <a:tc>
+                  <a:txBody>
+                    <a:bodyPr/>
+                    <a:lstStyle/>
+                    <a:p>
+                      <a:pPr indent="0" marL="0">
+                        <a:buNone/>
+                      </a:pPr>
+                      <a:r>
+                        <a:rPr lang="en-US" sz="1300" dirty="0">
+                          <a:solidFill>
+                            <a:srgbClr val="153C38"/>
+                          </a:solidFill>
+                          <a:latin typeface="Noto Sans CJK JP" pitchFamily="34" charset="0"/>
+                          <a:ea typeface="Noto Sans CJK JP" pitchFamily="34" charset="-122"/>
+                          <a:cs typeface="Noto Sans CJK JP" pitchFamily="34" charset="-120"/>
+                        </a:rPr>
+                        <a:t>Solidity 0.8.30</a:t>
+                      </a:r>
+                      <a:endParaRPr lang="en-US" sz="1300" dirty="0">
+                        <a:latin typeface="Noto Sans CJK JP" charset="0"/>
+                        <a:ea typeface="Noto Sans CJK JP" charset="0"/>
+                        <a:cs typeface="Noto Sans CJK JP" charset="0"/>
+                      </a:endParaRPr>
+                    </a:p>
+                    <a:p>
+                      <a:pPr indent="0" marL="0">
+                        <a:buNone/>
+                      </a:pPr>
+                      <a:r>
+                        <a:rPr lang="en-US" sz="1300" dirty="0">
+                          <a:solidFill>
+                            <a:srgbClr val="153C38"/>
+                          </a:solidFill>
+                          <a:latin typeface="Noto Sans CJK JP" pitchFamily="34" charset="0"/>
+                          <a:ea typeface="Noto Sans CJK JP" pitchFamily="34" charset="-122"/>
+                          <a:cs typeface="Noto Sans CJK JP" pitchFamily="34" charset="-120"/>
+                        </a:rPr>
+                        <a:t>自作部分の言語</a:t>
+                      </a:r>
+                      <a:endParaRPr lang="en-US" sz="1300" dirty="0">
+                        <a:latin typeface="Noto Sans CJK JP" charset="0"/>
+                        <a:ea typeface="Noto Sans CJK JP" charset="0"/>
+                        <a:cs typeface="Noto Sans CJK JP" charset="0"/>
+                      </a:endParaRPr>
+                    </a:p>
+                  </a:txBody>
+                  <a:tcPr marL="54864" marR="54864" marT="54864" marB="54864" anchor="mid">
+                    <a:lnL w="7620" cap="flat" cmpd="sng" algn="ctr">
+                      <a:solidFill>
+                        <a:srgbClr val="CBD8CE"/>
+                      </a:solidFill>
+                      <a:prstDash val="solid"/>
+                      <a:round/>
+                      <a:headEnd type="none" w="med" len="med"/>
+                      <a:tailEnd type="none" w="med" len="med"/>
+                    </a:lnL>
+                    <a:lnR w="7620" cap="flat" cmpd="sng" algn="ctr">
+                      <a:solidFill>
+                        <a:srgbClr val="CBD8CE"/>
+                      </a:solidFill>
+                      <a:prstDash val="solid"/>
+                      <a:round/>
+                      <a:headEnd type="none" w="med" len="med"/>
+                      <a:tailEnd type="none" w="med" len="med"/>
+                    </a:lnR>
+                    <a:lnT w="7620" cap="flat" cmpd="sng" algn="ctr">
+                      <a:solidFill>
+                        <a:srgbClr val="CBD8CE"/>
+                      </a:solidFill>
+                      <a:prstDash val="solid"/>
+                      <a:round/>
+                      <a:headEnd type="none" w="med" len="med"/>
+                      <a:tailEnd type="none" w="med" len="med"/>
+                    </a:lnT>
+                    <a:lnB w="7620" cap="flat" cmpd="sng" algn="ctr">
+                      <a:solidFill>
+                        <a:srgbClr val="CBD8CE"/>
+                      </a:solidFill>
+                      <a:prstDash val="solid"/>
+                      <a:round/>
+                      <a:headEnd type="none" w="med" len="med"/>
+                      <a:tailEnd type="none" w="med" len="med"/>
+                    </a:lnB>
+                    <a:solidFill>
+                      <a:srgbClr val="F4F6EF"/>
+                    </a:solidFill>
+                  </a:tcPr>
+                </a:tc>
+                <a:tc>
+                  <a:txBody>
+                    <a:bodyPr/>
+                    <a:lstStyle/>
+                    <a:p>
+                      <a:pPr indent="0" marL="0">
+                        <a:buNone/>
+                      </a:pPr>
+                      <a:r>
+                        <a:rPr lang="en-US" sz="1300" dirty="0">
+                          <a:solidFill>
+                            <a:srgbClr val="153C38"/>
+                          </a:solidFill>
+                          <a:latin typeface="Noto Sans CJK JP" pitchFamily="34" charset="0"/>
+                          <a:ea typeface="Noto Sans CJK JP" pitchFamily="34" charset="-122"/>
+                          <a:cs typeface="Noto Sans CJK JP" pitchFamily="34" charset="-120"/>
+                        </a:rPr>
+                        <a:t>個体・モデル参照・環境入力</a:t>
+                      </a:r>
+                      <a:endParaRPr lang="en-US" sz="1300" dirty="0">
+                        <a:latin typeface="Noto Sans CJK JP" charset="0"/>
+                        <a:ea typeface="Noto Sans CJK JP" charset="0"/>
+                        <a:cs typeface="Noto Sans CJK JP" charset="0"/>
+                      </a:endParaRPr>
+                    </a:p>
+                    <a:p>
+                      <a:pPr indent="0" marL="0">
+                        <a:buNone/>
+                      </a:pPr>
+                      <a:r>
+                        <a:rPr lang="en-US" sz="1300" dirty="0">
+                          <a:solidFill>
+                            <a:srgbClr val="153C38"/>
+                          </a:solidFill>
+                          <a:latin typeface="Noto Sans CJK JP" pitchFamily="34" charset="0"/>
+                          <a:ea typeface="Noto Sans CJK JP" pitchFamily="34" charset="-122"/>
+                          <a:cs typeface="Noto Sans CJK JP" pitchFamily="34" charset="-120"/>
+                        </a:rPr>
+                        <a:t>所有者制約・市場決済</a:t>
+                      </a:r>
+                      <a:endParaRPr lang="en-US" sz="1300" dirty="0">
+                        <a:latin typeface="Noto Sans CJK JP" charset="0"/>
+                        <a:ea typeface="Noto Sans CJK JP" charset="0"/>
+                        <a:cs typeface="Noto Sans CJK JP" charset="0"/>
+                      </a:endParaRPr>
+                    </a:p>
+                  </a:txBody>
+                  <a:tcPr marL="54864" marR="54864" marT="54864" marB="54864" anchor="mid">
+                    <a:lnL w="7620" cap="flat" cmpd="sng" algn="ctr">
+                      <a:solidFill>
+                        <a:srgbClr val="CBD8CE"/>
+                      </a:solidFill>
+                      <a:prstDash val="solid"/>
+                      <a:round/>
+                      <a:headEnd type="none" w="med" len="med"/>
+                      <a:tailEnd type="none" w="med" len="med"/>
+                    </a:lnL>
+                    <a:lnR w="7620" cap="flat" cmpd="sng" algn="ctr">
+                      <a:solidFill>
+                        <a:srgbClr val="CBD8CE"/>
+                      </a:solidFill>
+                      <a:prstDash val="solid"/>
+                      <a:round/>
+                      <a:headEnd type="none" w="med" len="med"/>
+                      <a:tailEnd type="none" w="med" len="med"/>
+                    </a:lnR>
+                    <a:lnT w="7620" cap="flat" cmpd="sng" algn="ctr">
+                      <a:solidFill>
+                        <a:srgbClr val="CBD8CE"/>
+                      </a:solidFill>
+                      <a:prstDash val="solid"/>
+                      <a:round/>
+                      <a:headEnd type="none" w="med" len="med"/>
+                      <a:tailEnd type="none" w="med" len="med"/>
+                    </a:lnT>
+                    <a:lnB w="7620" cap="flat" cmpd="sng" algn="ctr">
+                      <a:solidFill>
+                        <a:srgbClr val="CBD8CE"/>
+                      </a:solidFill>
+                      <a:prstDash val="solid"/>
+                      <a:round/>
+                      <a:headEnd type="none" w="med" len="med"/>
+                      <a:tailEnd type="none" w="med" len="med"/>
+                    </a:lnB>
+                    <a:solidFill>
+                      <a:srgbClr val="F4F6EF"/>
+                    </a:solidFill>
+                  </a:tcPr>
+                </a:tc>
+                <a:tc>
+                  <a:txBody>
+                    <a:bodyPr/>
+                    <a:lstStyle/>
+                    <a:p>
+                      <a:pPr indent="0" marL="0">
+                        <a:buNone/>
+                      </a:pPr>
+                      <a:r>
+                        <a:rPr lang="en-US" sz="1300" dirty="0">
+                          <a:solidFill>
+                            <a:srgbClr val="153C38"/>
+                          </a:solidFill>
+                          <a:latin typeface="Noto Sans CJK JP" pitchFamily="34" charset="0"/>
+                          <a:ea typeface="Noto Sans CJK JP" pitchFamily="34" charset="-122"/>
+                          <a:cs typeface="Noto Sans CJK JP" pitchFamily="34" charset="-120"/>
+                        </a:rPr>
+                        <a:t>ABI / events</a:t>
+                      </a:r>
+                      <a:endParaRPr lang="en-US" sz="1300" dirty="0">
+                        <a:latin typeface="Noto Sans CJK JP" charset="0"/>
+                        <a:ea typeface="Noto Sans CJK JP" charset="0"/>
+                        <a:cs typeface="Noto Sans CJK JP" charset="0"/>
+                      </a:endParaRPr>
+                    </a:p>
+                    <a:p>
+                      <a:pPr indent="0" marL="0">
+                        <a:buNone/>
+                      </a:pPr>
+                      <a:r>
+                        <a:rPr lang="en-US" sz="1300" dirty="0">
+                          <a:solidFill>
+                            <a:srgbClr val="153C38"/>
+                          </a:solidFill>
+                          <a:latin typeface="Noto Sans CJK JP" pitchFamily="34" charset="0"/>
+                          <a:ea typeface="Noto Sans CJK JP" pitchFamily="34" charset="-122"/>
+                          <a:cs typeface="Noto Sans CJK JP" pitchFamily="34" charset="-120"/>
+                        </a:rPr>
+                        <a:t>チェーン状態・成功receipt</a:t>
+                      </a:r>
+                      <a:endParaRPr lang="en-US" sz="1300" dirty="0">
+                        <a:latin typeface="Noto Sans CJK JP" charset="0"/>
+                        <a:ea typeface="Noto Sans CJK JP" charset="0"/>
+                        <a:cs typeface="Noto Sans CJK JP" charset="0"/>
+                      </a:endParaRPr>
+                    </a:p>
+                  </a:txBody>
+                  <a:tcPr marL="54864" marR="54864" marT="54864" marB="54864" anchor="mid">
+                    <a:lnL w="7620" cap="flat" cmpd="sng" algn="ctr">
+                      <a:solidFill>
+                        <a:srgbClr val="CBD8CE"/>
+                      </a:solidFill>
+                      <a:prstDash val="solid"/>
+                      <a:round/>
+                      <a:headEnd type="none" w="med" len="med"/>
+                      <a:tailEnd type="none" w="med" len="med"/>
+                    </a:lnL>
+                    <a:lnR w="7620" cap="flat" cmpd="sng" algn="ctr">
+                      <a:solidFill>
+                        <a:srgbClr val="CBD8CE"/>
+                      </a:solidFill>
+                      <a:prstDash val="solid"/>
+                      <a:round/>
+                      <a:headEnd type="none" w="med" len="med"/>
+                      <a:tailEnd type="none" w="med" len="med"/>
+                    </a:lnR>
+                    <a:lnT w="7620" cap="flat" cmpd="sng" algn="ctr">
+                      <a:solidFill>
+                        <a:srgbClr val="CBD8CE"/>
+                      </a:solidFill>
+                      <a:prstDash val="solid"/>
+                      <a:round/>
+                      <a:headEnd type="none" w="med" len="med"/>
+                      <a:tailEnd type="none" w="med" len="med"/>
+                    </a:lnT>
+                    <a:lnB w="7620" cap="flat" cmpd="sng" algn="ctr">
+                      <a:solidFill>
+                        <a:srgbClr val="CBD8CE"/>
+                      </a:solidFill>
+                      <a:prstDash val="solid"/>
+                      <a:round/>
+                      <a:headEnd type="none" w="med" len="med"/>
+                      <a:tailEnd type="none" w="med" len="med"/>
+                    </a:lnB>
+                    <a:solidFill>
+                      <a:srgbClr val="F4F6EF"/>
+                    </a:solidFill>
+                  </a:tcPr>
+                </a:tc>
+              </a:tr>
+            </a:tbl>
+          </a:graphicData>
+        </a:graphic>
+      </p:graphicFrame>
+      <p:sp>
+        <p:nvSpPr>
+          <p:cNvPr id="5" name="Shape 2"/>
+          <p:cNvSpPr/>
+          <p:nvPr/>
+        </p:nvSpPr>
+        <p:spPr>
+          <a:xfrm>
+            <a:off x="548640" y="5788152"/>
+            <a:ext cx="11064240" cy="429768"/>
+          </a:xfrm>
+          <a:prstGeom prst="rect">
+            <a:avLst/>
+          </a:prstGeom>
+          <a:solidFill>
+            <a:srgbClr val="E4ECE1"/>
+          </a:solidFill>
+          <a:ln w="12700">
+            <a:solidFill>
+              <a:srgbClr val="E4ECE1"/>
+            </a:solidFill>
+            <a:prstDash val="solid"/>
+          </a:ln>
+        </p:spPr>
+      </p:sp>
+      <p:sp>
+        <p:nvSpPr>
+          <p:cNvPr id="6" name="Text 3"/>
+          <p:cNvSpPr/>
+          <p:nvPr/>
+        </p:nvSpPr>
+        <p:spPr>
+          <a:xfrm>
+            <a:off x="749808" y="5852160"/>
+            <a:ext cx="10661904" cy="256032"/>
+          </a:xfrm>
+          <a:prstGeom prst="rect">
+            <a:avLst/>
+          </a:prstGeom>
+          <a:noFill/>
+          <a:ln/>
+        </p:spPr>
+        <p:txBody>
+          <a:bodyPr wrap="square" lIns="0" tIns="0" rIns="0" bIns="0" rtlCol="0" anchor="ctr"/>
+          <a:lstStyle/>
+          <a:p>
+            <a:pPr indent="0" marL="0">
+              <a:buNone/>
+            </a:pPr>
+            <a:r>
+              <a:rPr lang="en-US" sz="1050" dirty="0">
+                <a:solidFill>
+                  <a:srgbClr val="244D43"/>
+                </a:solidFill>
+              </a:rPr>
+              <a:t>共有型：TypeScriptの仕様案。学習状態はブラウザー／ローカル保存。Workersで全神経計算は行いません。</a:t>
+            </a:r>
+            <a:endParaRPr lang="en-US" sz="1050" dirty="0"/>
+          </a:p>
+        </p:txBody>
+      </p:sp>
+      <p:sp>
+        <p:nvSpPr>
+          <p:cNvPr id="7" name="Text 4"/>
+          <p:cNvSpPr/>
+          <p:nvPr/>
+        </p:nvSpPr>
+        <p:spPr>
+          <a:xfrm>
+            <a:off x="548640" y="6364224"/>
+            <a:ext cx="11064240" cy="201168"/>
+          </a:xfrm>
+          <a:prstGeom prst="rect">
+            <a:avLst/>
+          </a:prstGeom>
+          <a:noFill/>
+          <a:ln/>
+        </p:spPr>
+        <p:txBody>
+          <a:bodyPr wrap="square" lIns="0" tIns="0" rIns="0" bIns="0" rtlCol="0" anchor="ctr"/>
+          <a:lstStyle/>
+          <a:p>
+            <a:pPr indent="0" marL="0">
+              <a:buNone/>
+            </a:pPr>
+            <a:r>
+              <a:rPr lang="en-US" sz="1000" dirty="0">
+                <a:solidFill>
+                  <a:srgbClr val="607B70"/>
+                </a:solidFill>
+              </a:rPr>
+              <a:t>7 / 7    ·    質疑応答用の付録    ·    2026-09-26</a:t>
             </a:r>
             <a:endParaRPr lang="en-US" sz="1000" dirty="0"/>
           </a:p>
